--- a/slides/第09回_ネットワークの基礎.pptx
+++ b/slides/第09回_ネットワークの基礎.pptx
@@ -27,9 +27,14 @@
     <p:sldId id="275" r:id="rId21"/>
     <p:sldId id="276" r:id="rId22"/>
     <p:sldId id="277" r:id="rId23"/>
+    <p:sldId id="278" r:id="rId24"/>
+    <p:sldId id="279" r:id="rId25"/>
+    <p:sldId id="280" r:id="rId26"/>
+    <p:sldId id="281" r:id="rId27"/>
+    <p:sldId id="282" r:id="rId28"/>
   </p:sldIdLst>
   <p:notesMasterIdLst>
-    <p:notesMasterId r:id="rId24"/>
+    <p:notesMasterId r:id="rId29"/>
   </p:notesMasterIdLst>
   <p:sldSz cx="12192000" cy="6858000"/>
   <p:notesSz cx="6858000" cy="12192000"/>
@@ -1779,6 +1784,446 @@
             <a:fld id="{F7021451-1387-4CA6-816F-3879F97B5CBC}" type="slidenum">
               <a:rPr lang="en-US"/>
               <a:t>22</a:t>
+            </a:fld>
+            <a:endParaRPr lang="en-US"/>
+          </a:p>
+        </p:txBody>
+      </p:sp>
+    </p:spTree>
+    <p:extLst>
+      <p:ext uri="{BB962C8B-B14F-4D97-AF65-F5344CB8AC3E}">
+        <p14:creationId xmlns:p14="http://schemas.microsoft.com/office/powerpoint/2010/main" val="1024086991"/>
+      </p:ext>
+    </p:extLst>
+  </p:cSld>
+  <p:clrMapOvr>
+    <a:masterClrMapping/>
+  </p:clrMapOvr>
+</p:notes>
+</file>
+
+<file path=ppt/notesSlides/notesSlide23.xml><?xml version="1.0" encoding="utf-8"?>
+<p:notes xmlns:a="http://schemas.openxmlformats.org/drawingml/2006/main" xmlns:r="http://schemas.openxmlformats.org/officeDocument/2006/relationships" xmlns:p="http://schemas.openxmlformats.org/presentationml/2006/main">
+  <p:cSld>
+    <p:spTree>
+      <p:nvGrpSpPr>
+        <p:cNvPr id="1" name=""/>
+        <p:cNvGrpSpPr/>
+        <p:nvPr/>
+      </p:nvGrpSpPr>
+      <p:grpSpPr>
+        <a:xfrm>
+          <a:off x="0" y="0"/>
+          <a:ext cx="0" cy="0"/>
+          <a:chOff x="0" y="0"/>
+          <a:chExt cx="0" cy="0"/>
+        </a:xfrm>
+      </p:grpSpPr>
+      <p:sp>
+        <p:nvSpPr>
+          <p:cNvPr id="2" name="Slide Image Placeholder 1"/>
+          <p:cNvSpPr>
+            <a:spLocks noGrp="1" noRot="1" noChangeAspect="1"/>
+          </p:cNvSpPr>
+          <p:nvPr>
+            <p:ph type="sldImg"/>
+          </p:nvPr>
+        </p:nvSpPr>
+        <p:spPr/>
+      </p:sp>
+      <p:sp>
+        <p:nvSpPr>
+          <p:cNvPr id="3" name="Notes Placeholder 2"/>
+          <p:cNvSpPr>
+            <a:spLocks noGrp="1"/>
+          </p:cNvSpPr>
+          <p:nvPr>
+            <p:ph type="body" idx="1"/>
+          </p:nvPr>
+        </p:nvSpPr>
+        <p:spPr/>
+        <p:txBody>
+          <a:bodyPr/>
+          <a:lstStyle/>
+          <a:p>
+            <a:r>
+              <a:rPr lang="en-US" dirty="0"/>
+              <a:t/>
+            </a:r>
+            <a:endParaRPr lang="en-US" dirty="0"/>
+          </a:p>
+        </p:txBody>
+      </p:sp>
+      <p:sp>
+        <p:nvSpPr>
+          <p:cNvPr id="4" name="Slide Number Placeholder 3"/>
+          <p:cNvSpPr>
+            <a:spLocks noGrp="1"/>
+          </p:cNvSpPr>
+          <p:nvPr>
+            <p:ph type="sldNum" sz="quarter" idx="10"/>
+          </p:nvPr>
+        </p:nvSpPr>
+        <p:spPr/>
+        <p:txBody>
+          <a:bodyPr/>
+          <a:lstStyle/>
+          <a:p>
+            <a:fld id="{F7021451-1387-4CA6-816F-3879F97B5CBC}" type="slidenum">
+              <a:rPr lang="en-US"/>
+              <a:t>23</a:t>
+            </a:fld>
+            <a:endParaRPr lang="en-US"/>
+          </a:p>
+        </p:txBody>
+      </p:sp>
+    </p:spTree>
+    <p:extLst>
+      <p:ext uri="{BB962C8B-B14F-4D97-AF65-F5344CB8AC3E}">
+        <p14:creationId xmlns:p14="http://schemas.microsoft.com/office/powerpoint/2010/main" val="1024086991"/>
+      </p:ext>
+    </p:extLst>
+  </p:cSld>
+  <p:clrMapOvr>
+    <a:masterClrMapping/>
+  </p:clrMapOvr>
+</p:notes>
+</file>
+
+<file path=ppt/notesSlides/notesSlide24.xml><?xml version="1.0" encoding="utf-8"?>
+<p:notes xmlns:a="http://schemas.openxmlformats.org/drawingml/2006/main" xmlns:r="http://schemas.openxmlformats.org/officeDocument/2006/relationships" xmlns:p="http://schemas.openxmlformats.org/presentationml/2006/main">
+  <p:cSld>
+    <p:spTree>
+      <p:nvGrpSpPr>
+        <p:cNvPr id="1" name=""/>
+        <p:cNvGrpSpPr/>
+        <p:nvPr/>
+      </p:nvGrpSpPr>
+      <p:grpSpPr>
+        <a:xfrm>
+          <a:off x="0" y="0"/>
+          <a:ext cx="0" cy="0"/>
+          <a:chOff x="0" y="0"/>
+          <a:chExt cx="0" cy="0"/>
+        </a:xfrm>
+      </p:grpSpPr>
+      <p:sp>
+        <p:nvSpPr>
+          <p:cNvPr id="2" name="Slide Image Placeholder 1"/>
+          <p:cNvSpPr>
+            <a:spLocks noGrp="1" noRot="1" noChangeAspect="1"/>
+          </p:cNvSpPr>
+          <p:nvPr>
+            <p:ph type="sldImg"/>
+          </p:nvPr>
+        </p:nvSpPr>
+        <p:spPr/>
+      </p:sp>
+      <p:sp>
+        <p:nvSpPr>
+          <p:cNvPr id="3" name="Notes Placeholder 2"/>
+          <p:cNvSpPr>
+            <a:spLocks noGrp="1"/>
+          </p:cNvSpPr>
+          <p:nvPr>
+            <p:ph type="body" idx="1"/>
+          </p:nvPr>
+        </p:nvSpPr>
+        <p:spPr/>
+        <p:txBody>
+          <a:bodyPr/>
+          <a:lstStyle/>
+          <a:p>
+            <a:r>
+              <a:rPr lang="en-US" dirty="0"/>
+              <a:t/>
+            </a:r>
+            <a:endParaRPr lang="en-US" dirty="0"/>
+          </a:p>
+        </p:txBody>
+      </p:sp>
+      <p:sp>
+        <p:nvSpPr>
+          <p:cNvPr id="4" name="Slide Number Placeholder 3"/>
+          <p:cNvSpPr>
+            <a:spLocks noGrp="1"/>
+          </p:cNvSpPr>
+          <p:nvPr>
+            <p:ph type="sldNum" sz="quarter" idx="10"/>
+          </p:nvPr>
+        </p:nvSpPr>
+        <p:spPr/>
+        <p:txBody>
+          <a:bodyPr/>
+          <a:lstStyle/>
+          <a:p>
+            <a:fld id="{F7021451-1387-4CA6-816F-3879F97B5CBC}" type="slidenum">
+              <a:rPr lang="en-US"/>
+              <a:t>24</a:t>
+            </a:fld>
+            <a:endParaRPr lang="en-US"/>
+          </a:p>
+        </p:txBody>
+      </p:sp>
+    </p:spTree>
+    <p:extLst>
+      <p:ext uri="{BB962C8B-B14F-4D97-AF65-F5344CB8AC3E}">
+        <p14:creationId xmlns:p14="http://schemas.microsoft.com/office/powerpoint/2010/main" val="1024086991"/>
+      </p:ext>
+    </p:extLst>
+  </p:cSld>
+  <p:clrMapOvr>
+    <a:masterClrMapping/>
+  </p:clrMapOvr>
+</p:notes>
+</file>
+
+<file path=ppt/notesSlides/notesSlide25.xml><?xml version="1.0" encoding="utf-8"?>
+<p:notes xmlns:a="http://schemas.openxmlformats.org/drawingml/2006/main" xmlns:r="http://schemas.openxmlformats.org/officeDocument/2006/relationships" xmlns:p="http://schemas.openxmlformats.org/presentationml/2006/main">
+  <p:cSld>
+    <p:spTree>
+      <p:nvGrpSpPr>
+        <p:cNvPr id="1" name=""/>
+        <p:cNvGrpSpPr/>
+        <p:nvPr/>
+      </p:nvGrpSpPr>
+      <p:grpSpPr>
+        <a:xfrm>
+          <a:off x="0" y="0"/>
+          <a:ext cx="0" cy="0"/>
+          <a:chOff x="0" y="0"/>
+          <a:chExt cx="0" cy="0"/>
+        </a:xfrm>
+      </p:grpSpPr>
+      <p:sp>
+        <p:nvSpPr>
+          <p:cNvPr id="2" name="Slide Image Placeholder 1"/>
+          <p:cNvSpPr>
+            <a:spLocks noGrp="1" noRot="1" noChangeAspect="1"/>
+          </p:cNvSpPr>
+          <p:nvPr>
+            <p:ph type="sldImg"/>
+          </p:nvPr>
+        </p:nvSpPr>
+        <p:spPr/>
+      </p:sp>
+      <p:sp>
+        <p:nvSpPr>
+          <p:cNvPr id="3" name="Notes Placeholder 2"/>
+          <p:cNvSpPr>
+            <a:spLocks noGrp="1"/>
+          </p:cNvSpPr>
+          <p:nvPr>
+            <p:ph type="body" idx="1"/>
+          </p:nvPr>
+        </p:nvSpPr>
+        <p:spPr/>
+        <p:txBody>
+          <a:bodyPr/>
+          <a:lstStyle/>
+          <a:p>
+            <a:r>
+              <a:rPr lang="en-US" dirty="0"/>
+              <a:t/>
+            </a:r>
+            <a:endParaRPr lang="en-US" dirty="0"/>
+          </a:p>
+        </p:txBody>
+      </p:sp>
+      <p:sp>
+        <p:nvSpPr>
+          <p:cNvPr id="4" name="Slide Number Placeholder 3"/>
+          <p:cNvSpPr>
+            <a:spLocks noGrp="1"/>
+          </p:cNvSpPr>
+          <p:nvPr>
+            <p:ph type="sldNum" sz="quarter" idx="10"/>
+          </p:nvPr>
+        </p:nvSpPr>
+        <p:spPr/>
+        <p:txBody>
+          <a:bodyPr/>
+          <a:lstStyle/>
+          <a:p>
+            <a:fld id="{F7021451-1387-4CA6-816F-3879F97B5CBC}" type="slidenum">
+              <a:rPr lang="en-US"/>
+              <a:t>25</a:t>
+            </a:fld>
+            <a:endParaRPr lang="en-US"/>
+          </a:p>
+        </p:txBody>
+      </p:sp>
+    </p:spTree>
+    <p:extLst>
+      <p:ext uri="{BB962C8B-B14F-4D97-AF65-F5344CB8AC3E}">
+        <p14:creationId xmlns:p14="http://schemas.microsoft.com/office/powerpoint/2010/main" val="1024086991"/>
+      </p:ext>
+    </p:extLst>
+  </p:cSld>
+  <p:clrMapOvr>
+    <a:masterClrMapping/>
+  </p:clrMapOvr>
+</p:notes>
+</file>
+
+<file path=ppt/notesSlides/notesSlide26.xml><?xml version="1.0" encoding="utf-8"?>
+<p:notes xmlns:a="http://schemas.openxmlformats.org/drawingml/2006/main" xmlns:r="http://schemas.openxmlformats.org/officeDocument/2006/relationships" xmlns:p="http://schemas.openxmlformats.org/presentationml/2006/main">
+  <p:cSld>
+    <p:spTree>
+      <p:nvGrpSpPr>
+        <p:cNvPr id="1" name=""/>
+        <p:cNvGrpSpPr/>
+        <p:nvPr/>
+      </p:nvGrpSpPr>
+      <p:grpSpPr>
+        <a:xfrm>
+          <a:off x="0" y="0"/>
+          <a:ext cx="0" cy="0"/>
+          <a:chOff x="0" y="0"/>
+          <a:chExt cx="0" cy="0"/>
+        </a:xfrm>
+      </p:grpSpPr>
+      <p:sp>
+        <p:nvSpPr>
+          <p:cNvPr id="2" name="Slide Image Placeholder 1"/>
+          <p:cNvSpPr>
+            <a:spLocks noGrp="1" noRot="1" noChangeAspect="1"/>
+          </p:cNvSpPr>
+          <p:nvPr>
+            <p:ph type="sldImg"/>
+          </p:nvPr>
+        </p:nvSpPr>
+        <p:spPr/>
+      </p:sp>
+      <p:sp>
+        <p:nvSpPr>
+          <p:cNvPr id="3" name="Notes Placeholder 2"/>
+          <p:cNvSpPr>
+            <a:spLocks noGrp="1"/>
+          </p:cNvSpPr>
+          <p:nvPr>
+            <p:ph type="body" idx="1"/>
+          </p:nvPr>
+        </p:nvSpPr>
+        <p:spPr/>
+        <p:txBody>
+          <a:bodyPr/>
+          <a:lstStyle/>
+          <a:p>
+            <a:r>
+              <a:rPr lang="en-US" dirty="0"/>
+              <a:t/>
+            </a:r>
+            <a:endParaRPr lang="en-US" dirty="0"/>
+          </a:p>
+        </p:txBody>
+      </p:sp>
+      <p:sp>
+        <p:nvSpPr>
+          <p:cNvPr id="4" name="Slide Number Placeholder 3"/>
+          <p:cNvSpPr>
+            <a:spLocks noGrp="1"/>
+          </p:cNvSpPr>
+          <p:nvPr>
+            <p:ph type="sldNum" sz="quarter" idx="10"/>
+          </p:nvPr>
+        </p:nvSpPr>
+        <p:spPr/>
+        <p:txBody>
+          <a:bodyPr/>
+          <a:lstStyle/>
+          <a:p>
+            <a:fld id="{F7021451-1387-4CA6-816F-3879F97B5CBC}" type="slidenum">
+              <a:rPr lang="en-US"/>
+              <a:t>26</a:t>
+            </a:fld>
+            <a:endParaRPr lang="en-US"/>
+          </a:p>
+        </p:txBody>
+      </p:sp>
+    </p:spTree>
+    <p:extLst>
+      <p:ext uri="{BB962C8B-B14F-4D97-AF65-F5344CB8AC3E}">
+        <p14:creationId xmlns:p14="http://schemas.microsoft.com/office/powerpoint/2010/main" val="1024086991"/>
+      </p:ext>
+    </p:extLst>
+  </p:cSld>
+  <p:clrMapOvr>
+    <a:masterClrMapping/>
+  </p:clrMapOvr>
+</p:notes>
+</file>
+
+<file path=ppt/notesSlides/notesSlide27.xml><?xml version="1.0" encoding="utf-8"?>
+<p:notes xmlns:a="http://schemas.openxmlformats.org/drawingml/2006/main" xmlns:r="http://schemas.openxmlformats.org/officeDocument/2006/relationships" xmlns:p="http://schemas.openxmlformats.org/presentationml/2006/main">
+  <p:cSld>
+    <p:spTree>
+      <p:nvGrpSpPr>
+        <p:cNvPr id="1" name=""/>
+        <p:cNvGrpSpPr/>
+        <p:nvPr/>
+      </p:nvGrpSpPr>
+      <p:grpSpPr>
+        <a:xfrm>
+          <a:off x="0" y="0"/>
+          <a:ext cx="0" cy="0"/>
+          <a:chOff x="0" y="0"/>
+          <a:chExt cx="0" cy="0"/>
+        </a:xfrm>
+      </p:grpSpPr>
+      <p:sp>
+        <p:nvSpPr>
+          <p:cNvPr id="2" name="Slide Image Placeholder 1"/>
+          <p:cNvSpPr>
+            <a:spLocks noGrp="1" noRot="1" noChangeAspect="1"/>
+          </p:cNvSpPr>
+          <p:nvPr>
+            <p:ph type="sldImg"/>
+          </p:nvPr>
+        </p:nvSpPr>
+        <p:spPr/>
+      </p:sp>
+      <p:sp>
+        <p:nvSpPr>
+          <p:cNvPr id="3" name="Notes Placeholder 2"/>
+          <p:cNvSpPr>
+            <a:spLocks noGrp="1"/>
+          </p:cNvSpPr>
+          <p:nvPr>
+            <p:ph type="body" idx="1"/>
+          </p:nvPr>
+        </p:nvSpPr>
+        <p:spPr/>
+        <p:txBody>
+          <a:bodyPr/>
+          <a:lstStyle/>
+          <a:p>
+            <a:r>
+              <a:rPr lang="en-US" dirty="0"/>
+              <a:t/>
+            </a:r>
+            <a:endParaRPr lang="en-US" dirty="0"/>
+          </a:p>
+        </p:txBody>
+      </p:sp>
+      <p:sp>
+        <p:nvSpPr>
+          <p:cNvPr id="4" name="Slide Number Placeholder 3"/>
+          <p:cNvSpPr>
+            <a:spLocks noGrp="1"/>
+          </p:cNvSpPr>
+          <p:nvPr>
+            <p:ph type="sldNum" sz="quarter" idx="10"/>
+          </p:nvPr>
+        </p:nvSpPr>
+        <p:spPr/>
+        <p:txBody>
+          <a:bodyPr/>
+          <a:lstStyle/>
+          <a:p>
+            <a:fld id="{F7021451-1387-4CA6-816F-3879F97B5CBC}" type="slidenum">
+              <a:rPr lang="en-US"/>
+              <a:t>27</a:t>
             </a:fld>
             <a:endParaRPr lang="en-US"/>
           </a:p>
@@ -4984,7 +5429,7 @@
         <p:spPr>
           <a:xfrm>
             <a:off x="685800" y="1481328"/>
-            <a:ext cx="10789920" cy="621792"/>
+            <a:ext cx="10789920" cy="566928"/>
           </a:xfrm>
           <a:prstGeom prst="rect">
             <a:avLst/>
@@ -5033,8 +5478,8 @@
         </p:blipFill>
         <p:spPr>
           <a:xfrm>
-            <a:off x="2998269" y="2139696"/>
-            <a:ext cx="6164981" cy="3346704"/>
+            <a:off x="2947737" y="2084832"/>
+            <a:ext cx="6266046" cy="3401568"/>
           </a:xfrm>
           <a:prstGeom prst="rect">
             <a:avLst/>
@@ -5858,7 +6303,7 @@
         <p:spPr>
           <a:xfrm>
             <a:off x="685800" y="1481328"/>
-            <a:ext cx="10789920" cy="621792"/>
+            <a:ext cx="10789920" cy="365760"/>
           </a:xfrm>
           <a:prstGeom prst="rect">
             <a:avLst/>
@@ -5899,7 +6344,7 @@
         </p:nvSpPr>
         <p:spPr>
           <a:xfrm>
-            <a:off x="685800" y="2139696"/>
+            <a:off x="685800" y="1883664"/>
             <a:ext cx="5166360" cy="292608"/>
           </a:xfrm>
           <a:prstGeom prst="rect">
@@ -5938,7 +6383,7 @@
         </p:nvSpPr>
         <p:spPr>
           <a:xfrm>
-            <a:off x="685800" y="2542032"/>
+            <a:off x="685800" y="2286000"/>
             <a:ext cx="5166360" cy="1554480"/>
           </a:xfrm>
           <a:prstGeom prst="rect">
@@ -5980,7 +6425,7 @@
         </p:nvSpPr>
         <p:spPr>
           <a:xfrm>
-            <a:off x="6309360" y="2139696"/>
+            <a:off x="6309360" y="1883664"/>
             <a:ext cx="5166360" cy="292608"/>
           </a:xfrm>
           <a:prstGeom prst="rect">
@@ -6019,7 +6464,7 @@
         </p:nvSpPr>
         <p:spPr>
           <a:xfrm>
-            <a:off x="6309360" y="2542032"/>
+            <a:off x="6309360" y="2286000"/>
             <a:ext cx="5166360" cy="1554480"/>
           </a:xfrm>
           <a:prstGeom prst="rect">
@@ -7577,7 +8022,7 @@
         <p:spPr>
           <a:xfrm>
             <a:off x="685800" y="1481328"/>
-            <a:ext cx="10789920" cy="621792"/>
+            <a:ext cx="10789920" cy="365760"/>
           </a:xfrm>
           <a:prstGeom prst="rect">
             <a:avLst/>
@@ -7625,7 +8070,7 @@
           </p:nvPr>
         </p:nvGraphicFramePr>
         <p:xfrm>
-          <a:off x="685800" y="2139696"/>
+          <a:off x="685800" y="1883664"/>
           <a:ext cx="10789920" cy="914400"/>
         </p:xfrm>
         <a:graphic>
@@ -8874,7 +9319,7 @@
         </p:nvSpPr>
         <p:spPr>
           <a:xfrm>
-            <a:off x="685800" y="4453128"/>
+            <a:off x="685800" y="4197096"/>
             <a:ext cx="10789920" cy="658368"/>
           </a:xfrm>
           <a:prstGeom prst="roundRect">
@@ -8901,7 +9346,7 @@
         </p:nvSpPr>
         <p:spPr>
           <a:xfrm>
-            <a:off x="914400" y="4599432"/>
+            <a:off x="914400" y="4343400"/>
             <a:ext cx="10332720" cy="365760"/>
           </a:xfrm>
           <a:prstGeom prst="rect">
@@ -8940,7 +9385,7 @@
         </p:nvSpPr>
         <p:spPr>
           <a:xfrm>
-            <a:off x="685800" y="5276088"/>
+            <a:off x="685800" y="5020056"/>
             <a:ext cx="10789920" cy="457200"/>
           </a:xfrm>
           <a:prstGeom prst="rect">
@@ -9152,7 +9597,7 @@
         <p:spPr>
           <a:xfrm>
             <a:off x="685800" y="1481328"/>
-            <a:ext cx="10789920" cy="621792"/>
+            <a:ext cx="10789920" cy="365760"/>
           </a:xfrm>
           <a:prstGeom prst="rect">
             <a:avLst/>
@@ -9193,7 +9638,7 @@
         </p:nvSpPr>
         <p:spPr>
           <a:xfrm>
-            <a:off x="685800" y="2139696"/>
+            <a:off x="685800" y="1883664"/>
             <a:ext cx="5166360" cy="292608"/>
           </a:xfrm>
           <a:prstGeom prst="rect">
@@ -9239,7 +9684,7 @@
           </p:nvPr>
         </p:nvGraphicFramePr>
         <p:xfrm>
-          <a:off x="685800" y="2542032"/>
+          <a:off x="685800" y="2286000"/>
           <a:ext cx="5166360" cy="914400"/>
         </p:xfrm>
         <a:graphic>
@@ -10087,7 +10532,7 @@
         </p:nvSpPr>
         <p:spPr>
           <a:xfrm>
-            <a:off x="6309360" y="2139696"/>
+            <a:off x="6309360" y="1883664"/>
             <a:ext cx="5166360" cy="292608"/>
           </a:xfrm>
           <a:prstGeom prst="rect">
@@ -10126,7 +10571,7 @@
         </p:nvSpPr>
         <p:spPr>
           <a:xfrm>
-            <a:off x="6309360" y="2542032"/>
+            <a:off x="6309360" y="2286000"/>
             <a:ext cx="5166360" cy="1188720"/>
           </a:xfrm>
           <a:prstGeom prst="roundRect">
@@ -10153,7 +10598,7 @@
         </p:nvSpPr>
         <p:spPr>
           <a:xfrm>
-            <a:off x="6510528" y="2688336"/>
+            <a:off x="6510528" y="2432304"/>
             <a:ext cx="4764024" cy="896112"/>
           </a:xfrm>
           <a:prstGeom prst="rect">
@@ -10235,7 +10680,7 @@
         </p:nvSpPr>
         <p:spPr>
           <a:xfrm>
-            <a:off x="6309360" y="3959352"/>
+            <a:off x="6309360" y="3703320"/>
             <a:ext cx="5166360" cy="1554480"/>
           </a:xfrm>
           <a:prstGeom prst="rect">
@@ -11603,7 +12048,7 @@
         <p:spPr>
           <a:xfrm>
             <a:off x="685800" y="1481328"/>
-            <a:ext cx="10789920" cy="621792"/>
+            <a:ext cx="10789920" cy="365760"/>
           </a:xfrm>
           <a:prstGeom prst="rect">
             <a:avLst/>
@@ -11644,7 +12089,7 @@
         </p:nvSpPr>
         <p:spPr>
           <a:xfrm>
-            <a:off x="685800" y="2139696"/>
+            <a:off x="685800" y="1883664"/>
             <a:ext cx="5280660" cy="1280160"/>
           </a:xfrm>
           <a:prstGeom prst="roundRect">
@@ -11671,7 +12116,7 @@
         </p:nvSpPr>
         <p:spPr>
           <a:xfrm>
-            <a:off x="868680" y="2276856"/>
+            <a:off x="868680" y="2020824"/>
             <a:ext cx="4914900" cy="310896"/>
           </a:xfrm>
           <a:prstGeom prst="rect">
@@ -11710,7 +12155,7 @@
         </p:nvSpPr>
         <p:spPr>
           <a:xfrm>
-            <a:off x="868680" y="2624328"/>
+            <a:off x="868680" y="2368296"/>
             <a:ext cx="4914900" cy="640080"/>
           </a:xfrm>
           <a:prstGeom prst="rect">
@@ -11752,7 +12197,7 @@
         </p:nvSpPr>
         <p:spPr>
           <a:xfrm>
-            <a:off x="6195060" y="2139696"/>
+            <a:off x="6195060" y="1883664"/>
             <a:ext cx="5280660" cy="1280160"/>
           </a:xfrm>
           <a:prstGeom prst="roundRect">
@@ -11779,7 +12224,7 @@
         </p:nvSpPr>
         <p:spPr>
           <a:xfrm>
-            <a:off x="6377940" y="2276856"/>
+            <a:off x="6377940" y="2020824"/>
             <a:ext cx="4914900" cy="310896"/>
           </a:xfrm>
           <a:prstGeom prst="rect">
@@ -11818,7 +12263,7 @@
         </p:nvSpPr>
         <p:spPr>
           <a:xfrm>
-            <a:off x="6377940" y="2624328"/>
+            <a:off x="6377940" y="2368296"/>
             <a:ext cx="4914900" cy="640080"/>
           </a:xfrm>
           <a:prstGeom prst="rect">
@@ -11860,7 +12305,7 @@
         </p:nvSpPr>
         <p:spPr>
           <a:xfrm>
-            <a:off x="685800" y="3621024"/>
+            <a:off x="685800" y="3364992"/>
             <a:ext cx="5280660" cy="1280160"/>
           </a:xfrm>
           <a:prstGeom prst="roundRect">
@@ -11887,7 +12332,7 @@
         </p:nvSpPr>
         <p:spPr>
           <a:xfrm>
-            <a:off x="868680" y="3758184"/>
+            <a:off x="868680" y="3502152"/>
             <a:ext cx="4914900" cy="310896"/>
           </a:xfrm>
           <a:prstGeom prst="rect">
@@ -11926,7 +12371,7 @@
         </p:nvSpPr>
         <p:spPr>
           <a:xfrm>
-            <a:off x="868680" y="4105656"/>
+            <a:off x="868680" y="3849624"/>
             <a:ext cx="4914900" cy="640080"/>
           </a:xfrm>
           <a:prstGeom prst="rect">
@@ -11968,7 +12413,7 @@
         </p:nvSpPr>
         <p:spPr>
           <a:xfrm>
-            <a:off x="6195060" y="3621024"/>
+            <a:off x="6195060" y="3364992"/>
             <a:ext cx="5280660" cy="1280160"/>
           </a:xfrm>
           <a:prstGeom prst="roundRect">
@@ -11995,7 +12440,7 @@
         </p:nvSpPr>
         <p:spPr>
           <a:xfrm>
-            <a:off x="6377940" y="3758184"/>
+            <a:off x="6377940" y="3502152"/>
             <a:ext cx="4914900" cy="310896"/>
           </a:xfrm>
           <a:prstGeom prst="rect">
@@ -12034,7 +12479,7 @@
         </p:nvSpPr>
         <p:spPr>
           <a:xfrm>
-            <a:off x="6377940" y="4105656"/>
+            <a:off x="6377940" y="3849624"/>
             <a:ext cx="4914900" cy="640080"/>
           </a:xfrm>
           <a:prstGeom prst="rect">
@@ -12121,6 +12566,905 @@
 <file path=ppt/slides/slide21.xml><?xml version="1.0" encoding="utf-8"?>
 <p:sld xmlns:a="http://schemas.openxmlformats.org/drawingml/2006/main" xmlns:r="http://schemas.openxmlformats.org/officeDocument/2006/relationships" xmlns:p="http://schemas.openxmlformats.org/presentationml/2006/main">
   <p:cSld name="Slide 21">
+    <p:bg>
+      <p:bgPr>
+        <a:solidFill>
+          <a:srgbClr val="16191D"/>
+        </a:solidFill>
+      </p:bgPr>
+    </p:bg>
+    <p:spTree>
+      <p:nvGrpSpPr>
+        <p:cNvPr id="1" name=""/>
+        <p:cNvGrpSpPr/>
+        <p:nvPr/>
+      </p:nvGrpSpPr>
+      <p:grpSpPr>
+        <a:xfrm>
+          <a:off x="0" y="0"/>
+          <a:ext cx="0" cy="0"/>
+          <a:chOff x="0" y="0"/>
+          <a:chExt cx="0" cy="0"/>
+        </a:xfrm>
+      </p:grpSpPr>
+      <p:sp>
+        <p:nvSpPr>
+          <p:cNvPr id="2" name="Text 0"/>
+          <p:cNvSpPr/>
+          <p:nvPr/>
+        </p:nvSpPr>
+        <p:spPr>
+          <a:xfrm>
+            <a:off x="822960" y="2194560"/>
+            <a:ext cx="2743200" cy="822960"/>
+          </a:xfrm>
+          <a:prstGeom prst="rect">
+            <a:avLst/>
+          </a:prstGeom>
+          <a:noFill/>
+          <a:ln/>
+        </p:spPr>
+        <p:txBody>
+          <a:bodyPr wrap="square" lIns="0" tIns="0" rIns="0" bIns="0" rtlCol="0" anchor="ctr"/>
+          <a:lstStyle/>
+          <a:p>
+            <a:pPr indent="0" marL="0">
+              <a:buNone/>
+            </a:pPr>
+            <a:r>
+              <a:rPr lang="en-US" sz="5600" b="1" dirty="0">
+                <a:solidFill>
+                  <a:srgbClr val="2E3A4A"/>
+                </a:solidFill>
+                <a:latin typeface="Yu Gothic" pitchFamily="34" charset="0"/>
+                <a:ea typeface="Yu Gothic" pitchFamily="34" charset="-122"/>
+                <a:cs typeface="Yu Gothic" pitchFamily="34" charset="-120"/>
+              </a:rPr>
+              <a:t>9.5</a:t>
+            </a:r>
+            <a:endParaRPr lang="en-US" sz="5600" dirty="0"/>
+          </a:p>
+        </p:txBody>
+      </p:sp>
+      <p:sp>
+        <p:nvSpPr>
+          <p:cNvPr id="3" name="Text 1"/>
+          <p:cNvSpPr/>
+          <p:nvPr/>
+        </p:nvSpPr>
+        <p:spPr>
+          <a:xfrm>
+            <a:off x="822960" y="3063240"/>
+            <a:ext cx="10607040" cy="822960"/>
+          </a:xfrm>
+          <a:prstGeom prst="rect">
+            <a:avLst/>
+          </a:prstGeom>
+          <a:noFill/>
+          <a:ln/>
+        </p:spPr>
+        <p:txBody>
+          <a:bodyPr wrap="square" lIns="0" tIns="0" rIns="0" bIns="0" rtlCol="0" anchor="ctr"/>
+          <a:lstStyle/>
+          <a:p>
+            <a:pPr indent="0" marL="0">
+              <a:buNone/>
+            </a:pPr>
+            <a:r>
+              <a:rPr lang="en-US" sz="3800" b="1" dirty="0">
+                <a:solidFill>
+                  <a:srgbClr val="FFFFFF"/>
+                </a:solidFill>
+                <a:latin typeface="Yu Gothic" pitchFamily="34" charset="0"/>
+                <a:ea typeface="Yu Gothic" pitchFamily="34" charset="-122"/>
+                <a:cs typeface="Yu Gothic" pitchFamily="34" charset="-120"/>
+              </a:rPr>
+              <a:t>インターネット層：IP</a:t>
+            </a:r>
+            <a:endParaRPr lang="en-US" sz="3800" dirty="0"/>
+          </a:p>
+        </p:txBody>
+      </p:sp>
+      <p:sp>
+        <p:nvSpPr>
+          <p:cNvPr id="4" name="Text 2"/>
+          <p:cNvSpPr/>
+          <p:nvPr/>
+        </p:nvSpPr>
+        <p:spPr>
+          <a:xfrm>
+            <a:off x="822960" y="3977640"/>
+            <a:ext cx="10607040" cy="457200"/>
+          </a:xfrm>
+          <a:prstGeom prst="rect">
+            <a:avLst/>
+          </a:prstGeom>
+          <a:noFill/>
+          <a:ln/>
+        </p:spPr>
+        <p:txBody>
+          <a:bodyPr wrap="square" lIns="0" tIns="0" rIns="0" bIns="0" rtlCol="0" anchor="ctr"/>
+          <a:lstStyle/>
+          <a:p>
+            <a:pPr indent="0" marL="0">
+              <a:buNone/>
+            </a:pPr>
+            <a:r>
+              <a:rPr lang="en-US" sz="1700" dirty="0">
+                <a:solidFill>
+                  <a:srgbClr val="9AA3B0"/>
+                </a:solidFill>
+                <a:latin typeface="Yu Gothic" pitchFamily="34" charset="0"/>
+                <a:ea typeface="Yu Gothic" pitchFamily="34" charset="-122"/>
+                <a:cs typeface="Yu Gothic" pitchFamily="34" charset="-120"/>
+              </a:rPr>
+              <a:t>網をまたいで、最終的な宛先まで中継する</a:t>
+            </a:r>
+            <a:endParaRPr lang="en-US" sz="1700" dirty="0"/>
+          </a:p>
+        </p:txBody>
+      </p:sp>
+      <p:sp>
+        <p:nvSpPr>
+          <p:cNvPr id="5" name="Shape 3"/>
+          <p:cNvSpPr/>
+          <p:nvPr/>
+        </p:nvSpPr>
+        <p:spPr>
+          <a:xfrm>
+            <a:off x="548640" y="5852160"/>
+            <a:ext cx="265176" cy="182880"/>
+          </a:xfrm>
+          <a:prstGeom prst="rect">
+            <a:avLst/>
+          </a:prstGeom>
+          <a:solidFill>
+            <a:srgbClr val="FFFFFF">
+              <a:alpha val="12000"/>
+            </a:srgbClr>
+          </a:solidFill>
+          <a:ln w="7620">
+            <a:solidFill>
+              <a:srgbClr val="6AB0F3">
+                <a:alpha val="45000"/>
+              </a:srgbClr>
+            </a:solidFill>
+            <a:prstDash val="solid"/>
+          </a:ln>
+        </p:spPr>
+      </p:sp>
+      <p:sp>
+        <p:nvSpPr>
+          <p:cNvPr id="6" name="Shape 4"/>
+          <p:cNvSpPr/>
+          <p:nvPr/>
+        </p:nvSpPr>
+        <p:spPr>
+          <a:xfrm>
+            <a:off x="850392" y="5852160"/>
+            <a:ext cx="265176" cy="182880"/>
+          </a:xfrm>
+          <a:prstGeom prst="rect">
+            <a:avLst/>
+          </a:prstGeom>
+          <a:solidFill>
+            <a:srgbClr val="FFFFFF">
+              <a:alpha val="12000"/>
+            </a:srgbClr>
+          </a:solidFill>
+          <a:ln w="7620">
+            <a:solidFill>
+              <a:srgbClr val="6AB0F3">
+                <a:alpha val="45000"/>
+              </a:srgbClr>
+            </a:solidFill>
+            <a:prstDash val="solid"/>
+          </a:ln>
+        </p:spPr>
+      </p:sp>
+      <p:sp>
+        <p:nvSpPr>
+          <p:cNvPr id="7" name="Shape 5"/>
+          <p:cNvSpPr/>
+          <p:nvPr/>
+        </p:nvSpPr>
+        <p:spPr>
+          <a:xfrm>
+            <a:off x="1152144" y="5852160"/>
+            <a:ext cx="265176" cy="182880"/>
+          </a:xfrm>
+          <a:prstGeom prst="rect">
+            <a:avLst/>
+          </a:prstGeom>
+          <a:solidFill>
+            <a:srgbClr val="FFFFFF">
+              <a:alpha val="12000"/>
+            </a:srgbClr>
+          </a:solidFill>
+          <a:ln w="7620">
+            <a:solidFill>
+              <a:srgbClr val="6AB0F3">
+                <a:alpha val="45000"/>
+              </a:srgbClr>
+            </a:solidFill>
+            <a:prstDash val="solid"/>
+          </a:ln>
+        </p:spPr>
+      </p:sp>
+      <p:sp>
+        <p:nvSpPr>
+          <p:cNvPr id="8" name="Shape 6"/>
+          <p:cNvSpPr/>
+          <p:nvPr/>
+        </p:nvSpPr>
+        <p:spPr>
+          <a:xfrm>
+            <a:off x="1453896" y="5852160"/>
+            <a:ext cx="265176" cy="182880"/>
+          </a:xfrm>
+          <a:prstGeom prst="rect">
+            <a:avLst/>
+          </a:prstGeom>
+          <a:solidFill>
+            <a:srgbClr val="FFFFFF">
+              <a:alpha val="12000"/>
+            </a:srgbClr>
+          </a:solidFill>
+          <a:ln w="7620">
+            <a:solidFill>
+              <a:srgbClr val="6AB0F3">
+                <a:alpha val="45000"/>
+              </a:srgbClr>
+            </a:solidFill>
+            <a:prstDash val="solid"/>
+          </a:ln>
+        </p:spPr>
+      </p:sp>
+      <p:sp>
+        <p:nvSpPr>
+          <p:cNvPr id="9" name="Shape 7"/>
+          <p:cNvSpPr/>
+          <p:nvPr/>
+        </p:nvSpPr>
+        <p:spPr>
+          <a:xfrm>
+            <a:off x="1755648" y="5852160"/>
+            <a:ext cx="265176" cy="182880"/>
+          </a:xfrm>
+          <a:prstGeom prst="rect">
+            <a:avLst/>
+          </a:prstGeom>
+          <a:solidFill>
+            <a:srgbClr val="FFFFFF">
+              <a:alpha val="12000"/>
+            </a:srgbClr>
+          </a:solidFill>
+          <a:ln w="7620">
+            <a:solidFill>
+              <a:srgbClr val="6AB0F3">
+                <a:alpha val="45000"/>
+              </a:srgbClr>
+            </a:solidFill>
+            <a:prstDash val="solid"/>
+          </a:ln>
+        </p:spPr>
+      </p:sp>
+      <p:sp>
+        <p:nvSpPr>
+          <p:cNvPr id="10" name="Shape 8"/>
+          <p:cNvSpPr/>
+          <p:nvPr/>
+        </p:nvSpPr>
+        <p:spPr>
+          <a:xfrm>
+            <a:off x="2057400" y="5852160"/>
+            <a:ext cx="265176" cy="182880"/>
+          </a:xfrm>
+          <a:prstGeom prst="rect">
+            <a:avLst/>
+          </a:prstGeom>
+          <a:solidFill>
+            <a:srgbClr val="FFFFFF">
+              <a:alpha val="12000"/>
+            </a:srgbClr>
+          </a:solidFill>
+          <a:ln w="7620">
+            <a:solidFill>
+              <a:srgbClr val="6AB0F3">
+                <a:alpha val="45000"/>
+              </a:srgbClr>
+            </a:solidFill>
+            <a:prstDash val="solid"/>
+          </a:ln>
+        </p:spPr>
+      </p:sp>
+      <p:sp>
+        <p:nvSpPr>
+          <p:cNvPr id="11" name="Shape 9"/>
+          <p:cNvSpPr/>
+          <p:nvPr/>
+        </p:nvSpPr>
+        <p:spPr>
+          <a:xfrm>
+            <a:off x="2359152" y="5852160"/>
+            <a:ext cx="265176" cy="182880"/>
+          </a:xfrm>
+          <a:prstGeom prst="rect">
+            <a:avLst/>
+          </a:prstGeom>
+          <a:solidFill>
+            <a:srgbClr val="FFFFFF">
+              <a:alpha val="12000"/>
+            </a:srgbClr>
+          </a:solidFill>
+          <a:ln w="7620">
+            <a:solidFill>
+              <a:srgbClr val="6AB0F3">
+                <a:alpha val="45000"/>
+              </a:srgbClr>
+            </a:solidFill>
+            <a:prstDash val="solid"/>
+          </a:ln>
+        </p:spPr>
+      </p:sp>
+      <p:sp>
+        <p:nvSpPr>
+          <p:cNvPr id="12" name="Shape 10"/>
+          <p:cNvSpPr/>
+          <p:nvPr/>
+        </p:nvSpPr>
+        <p:spPr>
+          <a:xfrm>
+            <a:off x="2660904" y="5852160"/>
+            <a:ext cx="265176" cy="182880"/>
+          </a:xfrm>
+          <a:prstGeom prst="rect">
+            <a:avLst/>
+          </a:prstGeom>
+          <a:solidFill>
+            <a:srgbClr val="FFFFFF">
+              <a:alpha val="12000"/>
+            </a:srgbClr>
+          </a:solidFill>
+          <a:ln w="7620">
+            <a:solidFill>
+              <a:srgbClr val="6AB0F3">
+                <a:alpha val="45000"/>
+              </a:srgbClr>
+            </a:solidFill>
+            <a:prstDash val="solid"/>
+          </a:ln>
+        </p:spPr>
+      </p:sp>
+      <p:sp>
+        <p:nvSpPr>
+          <p:cNvPr id="13" name="Shape 11"/>
+          <p:cNvSpPr/>
+          <p:nvPr/>
+        </p:nvSpPr>
+        <p:spPr>
+          <a:xfrm>
+            <a:off x="2962656" y="5852160"/>
+            <a:ext cx="265176" cy="182880"/>
+          </a:xfrm>
+          <a:prstGeom prst="rect">
+            <a:avLst/>
+          </a:prstGeom>
+          <a:solidFill>
+            <a:srgbClr val="FFFFFF">
+              <a:alpha val="12000"/>
+            </a:srgbClr>
+          </a:solidFill>
+          <a:ln w="7620">
+            <a:solidFill>
+              <a:srgbClr val="6AB0F3">
+                <a:alpha val="45000"/>
+              </a:srgbClr>
+            </a:solidFill>
+            <a:prstDash val="solid"/>
+          </a:ln>
+        </p:spPr>
+      </p:sp>
+      <p:sp>
+        <p:nvSpPr>
+          <p:cNvPr id="14" name="Shape 12"/>
+          <p:cNvSpPr/>
+          <p:nvPr/>
+        </p:nvSpPr>
+        <p:spPr>
+          <a:xfrm>
+            <a:off x="3264408" y="5852160"/>
+            <a:ext cx="265176" cy="182880"/>
+          </a:xfrm>
+          <a:prstGeom prst="rect">
+            <a:avLst/>
+          </a:prstGeom>
+          <a:solidFill>
+            <a:srgbClr val="6AB0F3"/>
+          </a:solidFill>
+          <a:ln w="7620">
+            <a:solidFill>
+              <a:srgbClr val="6AB0F3">
+                <a:alpha val="45000"/>
+              </a:srgbClr>
+            </a:solidFill>
+            <a:prstDash val="solid"/>
+          </a:ln>
+        </p:spPr>
+      </p:sp>
+      <p:sp>
+        <p:nvSpPr>
+          <p:cNvPr id="15" name="Shape 13"/>
+          <p:cNvSpPr/>
+          <p:nvPr/>
+        </p:nvSpPr>
+        <p:spPr>
+          <a:xfrm>
+            <a:off x="3566160" y="5852160"/>
+            <a:ext cx="265176" cy="182880"/>
+          </a:xfrm>
+          <a:prstGeom prst="rect">
+            <a:avLst/>
+          </a:prstGeom>
+          <a:solidFill>
+            <a:srgbClr val="FFFFFF">
+              <a:alpha val="12000"/>
+            </a:srgbClr>
+          </a:solidFill>
+          <a:ln w="7620">
+            <a:solidFill>
+              <a:srgbClr val="6AB0F3">
+                <a:alpha val="45000"/>
+              </a:srgbClr>
+            </a:solidFill>
+            <a:prstDash val="solid"/>
+          </a:ln>
+        </p:spPr>
+      </p:sp>
+      <p:sp>
+        <p:nvSpPr>
+          <p:cNvPr id="16" name="Shape 14"/>
+          <p:cNvSpPr/>
+          <p:nvPr/>
+        </p:nvSpPr>
+        <p:spPr>
+          <a:xfrm>
+            <a:off x="3867912" y="5852160"/>
+            <a:ext cx="265176" cy="182880"/>
+          </a:xfrm>
+          <a:prstGeom prst="rect">
+            <a:avLst/>
+          </a:prstGeom>
+          <a:solidFill>
+            <a:srgbClr val="FFFFFF">
+              <a:alpha val="12000"/>
+            </a:srgbClr>
+          </a:solidFill>
+          <a:ln w="7620">
+            <a:solidFill>
+              <a:srgbClr val="6AB0F3">
+                <a:alpha val="45000"/>
+              </a:srgbClr>
+            </a:solidFill>
+            <a:prstDash val="solid"/>
+          </a:ln>
+        </p:spPr>
+      </p:sp>
+      <p:sp>
+        <p:nvSpPr>
+          <p:cNvPr id="17" name="Shape 15"/>
+          <p:cNvSpPr/>
+          <p:nvPr/>
+        </p:nvSpPr>
+        <p:spPr>
+          <a:xfrm>
+            <a:off x="4169664" y="5852160"/>
+            <a:ext cx="265176" cy="182880"/>
+          </a:xfrm>
+          <a:prstGeom prst="rect">
+            <a:avLst/>
+          </a:prstGeom>
+          <a:solidFill>
+            <a:srgbClr val="FFFFFF">
+              <a:alpha val="12000"/>
+            </a:srgbClr>
+          </a:solidFill>
+          <a:ln w="7620">
+            <a:solidFill>
+              <a:srgbClr val="6AB0F3">
+                <a:alpha val="45000"/>
+              </a:srgbClr>
+            </a:solidFill>
+            <a:prstDash val="solid"/>
+          </a:ln>
+        </p:spPr>
+      </p:sp>
+      <p:sp>
+        <p:nvSpPr>
+          <p:cNvPr id="18" name="Shape 16"/>
+          <p:cNvSpPr/>
+          <p:nvPr/>
+        </p:nvSpPr>
+        <p:spPr>
+          <a:xfrm>
+            <a:off x="4471416" y="5852160"/>
+            <a:ext cx="265176" cy="182880"/>
+          </a:xfrm>
+          <a:prstGeom prst="rect">
+            <a:avLst/>
+          </a:prstGeom>
+          <a:solidFill>
+            <a:srgbClr val="FFFFFF">
+              <a:alpha val="12000"/>
+            </a:srgbClr>
+          </a:solidFill>
+          <a:ln w="7620">
+            <a:solidFill>
+              <a:srgbClr val="6AB0F3">
+                <a:alpha val="45000"/>
+              </a:srgbClr>
+            </a:solidFill>
+            <a:prstDash val="solid"/>
+          </a:ln>
+        </p:spPr>
+      </p:sp>
+      <p:sp>
+        <p:nvSpPr>
+          <p:cNvPr id="19" name="Shape 17"/>
+          <p:cNvSpPr/>
+          <p:nvPr/>
+        </p:nvSpPr>
+        <p:spPr>
+          <a:xfrm>
+            <a:off x="4773168" y="5852160"/>
+            <a:ext cx="265176" cy="182880"/>
+          </a:xfrm>
+          <a:prstGeom prst="rect">
+            <a:avLst/>
+          </a:prstGeom>
+          <a:solidFill>
+            <a:srgbClr val="FFFFFF">
+              <a:alpha val="12000"/>
+            </a:srgbClr>
+          </a:solidFill>
+          <a:ln w="7620">
+            <a:solidFill>
+              <a:srgbClr val="6AB0F3">
+                <a:alpha val="45000"/>
+              </a:srgbClr>
+            </a:solidFill>
+            <a:prstDash val="solid"/>
+          </a:ln>
+        </p:spPr>
+      </p:sp>
+      <p:sp>
+        <p:nvSpPr>
+          <p:cNvPr id="20" name="Shape 18"/>
+          <p:cNvSpPr/>
+          <p:nvPr/>
+        </p:nvSpPr>
+        <p:spPr>
+          <a:xfrm>
+            <a:off x="5074920" y="5852160"/>
+            <a:ext cx="265176" cy="182880"/>
+          </a:xfrm>
+          <a:prstGeom prst="rect">
+            <a:avLst/>
+          </a:prstGeom>
+          <a:solidFill>
+            <a:srgbClr val="FFFFFF">
+              <a:alpha val="12000"/>
+            </a:srgbClr>
+          </a:solidFill>
+          <a:ln w="7620">
+            <a:solidFill>
+              <a:srgbClr val="6AB0F3">
+                <a:alpha val="45000"/>
+              </a:srgbClr>
+            </a:solidFill>
+            <a:prstDash val="solid"/>
+          </a:ln>
+        </p:spPr>
+      </p:sp>
+      <p:sp>
+        <p:nvSpPr>
+          <p:cNvPr id="21" name="Shape 19"/>
+          <p:cNvSpPr/>
+          <p:nvPr/>
+        </p:nvSpPr>
+        <p:spPr>
+          <a:xfrm>
+            <a:off x="5376672" y="5852160"/>
+            <a:ext cx="265176" cy="182880"/>
+          </a:xfrm>
+          <a:prstGeom prst="rect">
+            <a:avLst/>
+          </a:prstGeom>
+          <a:solidFill>
+            <a:srgbClr val="FFFFFF">
+              <a:alpha val="12000"/>
+            </a:srgbClr>
+          </a:solidFill>
+          <a:ln w="7620">
+            <a:solidFill>
+              <a:srgbClr val="6AB0F3">
+                <a:alpha val="45000"/>
+              </a:srgbClr>
+            </a:solidFill>
+            <a:prstDash val="solid"/>
+          </a:ln>
+        </p:spPr>
+      </p:sp>
+      <p:sp>
+        <p:nvSpPr>
+          <p:cNvPr id="22" name="Shape 20"/>
+          <p:cNvSpPr/>
+          <p:nvPr/>
+        </p:nvSpPr>
+        <p:spPr>
+          <a:xfrm>
+            <a:off x="5678424" y="5852160"/>
+            <a:ext cx="265176" cy="182880"/>
+          </a:xfrm>
+          <a:prstGeom prst="rect">
+            <a:avLst/>
+          </a:prstGeom>
+          <a:solidFill>
+            <a:srgbClr val="FFFFFF">
+              <a:alpha val="12000"/>
+            </a:srgbClr>
+          </a:solidFill>
+          <a:ln w="7620">
+            <a:solidFill>
+              <a:srgbClr val="6AB0F3">
+                <a:alpha val="45000"/>
+              </a:srgbClr>
+            </a:solidFill>
+            <a:prstDash val="solid"/>
+          </a:ln>
+        </p:spPr>
+      </p:sp>
+      <p:sp>
+        <p:nvSpPr>
+          <p:cNvPr id="23" name="Shape 21"/>
+          <p:cNvSpPr/>
+          <p:nvPr/>
+        </p:nvSpPr>
+        <p:spPr>
+          <a:xfrm>
+            <a:off x="5980176" y="5852160"/>
+            <a:ext cx="265176" cy="182880"/>
+          </a:xfrm>
+          <a:prstGeom prst="rect">
+            <a:avLst/>
+          </a:prstGeom>
+          <a:solidFill>
+            <a:srgbClr val="FFFFFF">
+              <a:alpha val="12000"/>
+            </a:srgbClr>
+          </a:solidFill>
+          <a:ln w="7620">
+            <a:solidFill>
+              <a:srgbClr val="6AB0F3">
+                <a:alpha val="45000"/>
+              </a:srgbClr>
+            </a:solidFill>
+            <a:prstDash val="solid"/>
+          </a:ln>
+        </p:spPr>
+      </p:sp>
+      <p:sp>
+        <p:nvSpPr>
+          <p:cNvPr id="24" name="Shape 22"/>
+          <p:cNvSpPr/>
+          <p:nvPr/>
+        </p:nvSpPr>
+        <p:spPr>
+          <a:xfrm>
+            <a:off x="6281928" y="5852160"/>
+            <a:ext cx="265176" cy="182880"/>
+          </a:xfrm>
+          <a:prstGeom prst="rect">
+            <a:avLst/>
+          </a:prstGeom>
+          <a:solidFill>
+            <a:srgbClr val="FFFFFF">
+              <a:alpha val="12000"/>
+            </a:srgbClr>
+          </a:solidFill>
+          <a:ln w="7620">
+            <a:solidFill>
+              <a:srgbClr val="6AB0F3">
+                <a:alpha val="45000"/>
+              </a:srgbClr>
+            </a:solidFill>
+            <a:prstDash val="solid"/>
+          </a:ln>
+        </p:spPr>
+      </p:sp>
+      <p:sp>
+        <p:nvSpPr>
+          <p:cNvPr id="25" name="Shape 23"/>
+          <p:cNvSpPr/>
+          <p:nvPr/>
+        </p:nvSpPr>
+        <p:spPr>
+          <a:xfrm>
+            <a:off x="6583680" y="5852160"/>
+            <a:ext cx="265176" cy="182880"/>
+          </a:xfrm>
+          <a:prstGeom prst="rect">
+            <a:avLst/>
+          </a:prstGeom>
+          <a:solidFill>
+            <a:srgbClr val="FFFFFF">
+              <a:alpha val="12000"/>
+            </a:srgbClr>
+          </a:solidFill>
+          <a:ln w="7620">
+            <a:solidFill>
+              <a:srgbClr val="6AB0F3">
+                <a:alpha val="45000"/>
+              </a:srgbClr>
+            </a:solidFill>
+            <a:prstDash val="solid"/>
+          </a:ln>
+        </p:spPr>
+      </p:sp>
+      <p:sp>
+        <p:nvSpPr>
+          <p:cNvPr id="26" name="Shape 24"/>
+          <p:cNvSpPr/>
+          <p:nvPr/>
+        </p:nvSpPr>
+        <p:spPr>
+          <a:xfrm>
+            <a:off x="6885432" y="5852160"/>
+            <a:ext cx="265176" cy="182880"/>
+          </a:xfrm>
+          <a:prstGeom prst="rect">
+            <a:avLst/>
+          </a:prstGeom>
+          <a:solidFill>
+            <a:srgbClr val="6AB0F3"/>
+          </a:solidFill>
+          <a:ln w="7620">
+            <a:solidFill>
+              <a:srgbClr val="6AB0F3">
+                <a:alpha val="45000"/>
+              </a:srgbClr>
+            </a:solidFill>
+            <a:prstDash val="solid"/>
+          </a:ln>
+        </p:spPr>
+      </p:sp>
+      <p:sp>
+        <p:nvSpPr>
+          <p:cNvPr id="27" name="Shape 25"/>
+          <p:cNvSpPr/>
+          <p:nvPr/>
+        </p:nvSpPr>
+        <p:spPr>
+          <a:xfrm>
+            <a:off x="7187184" y="5852160"/>
+            <a:ext cx="265176" cy="182880"/>
+          </a:xfrm>
+          <a:prstGeom prst="rect">
+            <a:avLst/>
+          </a:prstGeom>
+          <a:solidFill>
+            <a:srgbClr val="FFFFFF">
+              <a:alpha val="12000"/>
+            </a:srgbClr>
+          </a:solidFill>
+          <a:ln w="7620">
+            <a:solidFill>
+              <a:srgbClr val="6AB0F3">
+                <a:alpha val="45000"/>
+              </a:srgbClr>
+            </a:solidFill>
+            <a:prstDash val="solid"/>
+          </a:ln>
+        </p:spPr>
+      </p:sp>
+      <p:sp>
+        <p:nvSpPr>
+          <p:cNvPr id="28" name="Shape 26"/>
+          <p:cNvSpPr/>
+          <p:nvPr/>
+        </p:nvSpPr>
+        <p:spPr>
+          <a:xfrm>
+            <a:off x="7488936" y="5852160"/>
+            <a:ext cx="265176" cy="182880"/>
+          </a:xfrm>
+          <a:prstGeom prst="rect">
+            <a:avLst/>
+          </a:prstGeom>
+          <a:solidFill>
+            <a:srgbClr val="FFFFFF">
+              <a:alpha val="12000"/>
+            </a:srgbClr>
+          </a:solidFill>
+          <a:ln w="7620">
+            <a:solidFill>
+              <a:srgbClr val="6AB0F3">
+                <a:alpha val="45000"/>
+              </a:srgbClr>
+            </a:solidFill>
+            <a:prstDash val="solid"/>
+          </a:ln>
+        </p:spPr>
+      </p:sp>
+      <p:sp>
+        <p:nvSpPr>
+          <p:cNvPr id="29" name="Shape 27"/>
+          <p:cNvSpPr/>
+          <p:nvPr/>
+        </p:nvSpPr>
+        <p:spPr>
+          <a:xfrm>
+            <a:off x="7790688" y="5852160"/>
+            <a:ext cx="265176" cy="182880"/>
+          </a:xfrm>
+          <a:prstGeom prst="rect">
+            <a:avLst/>
+          </a:prstGeom>
+          <a:solidFill>
+            <a:srgbClr val="FFFFFF">
+              <a:alpha val="12000"/>
+            </a:srgbClr>
+          </a:solidFill>
+          <a:ln w="7620">
+            <a:solidFill>
+              <a:srgbClr val="6AB0F3">
+                <a:alpha val="45000"/>
+              </a:srgbClr>
+            </a:solidFill>
+            <a:prstDash val="solid"/>
+          </a:ln>
+        </p:spPr>
+      </p:sp>
+      <p:sp>
+        <p:nvSpPr>
+          <p:cNvPr id="30" name="Shape 28"/>
+          <p:cNvSpPr/>
+          <p:nvPr/>
+        </p:nvSpPr>
+        <p:spPr>
+          <a:xfrm>
+            <a:off x="8092440" y="5852160"/>
+            <a:ext cx="265176" cy="182880"/>
+          </a:xfrm>
+          <a:prstGeom prst="rect">
+            <a:avLst/>
+          </a:prstGeom>
+          <a:solidFill>
+            <a:srgbClr val="FFFFFF">
+              <a:alpha val="12000"/>
+            </a:srgbClr>
+          </a:solidFill>
+          <a:ln w="7620">
+            <a:solidFill>
+              <a:srgbClr val="6AB0F3">
+                <a:alpha val="45000"/>
+              </a:srgbClr>
+            </a:solidFill>
+            <a:prstDash val="solid"/>
+          </a:ln>
+        </p:spPr>
+      </p:sp>
+    </p:spTree>
+  </p:cSld>
+  <p:clrMapOvr>
+    <a:masterClrMapping/>
+  </p:clrMapOvr>
+</p:sld>
+</file>
+
+<file path=ppt/slides/slide22.xml><?xml version="1.0" encoding="utf-8"?>
+<p:sld xmlns:a="http://schemas.openxmlformats.org/drawingml/2006/main" xmlns:r="http://schemas.openxmlformats.org/officeDocument/2006/relationships" xmlns:p="http://schemas.openxmlformats.org/presentationml/2006/main">
+  <p:cSld name="Slide 22">
     <p:bg>
       <p:bgPr>
         <a:solidFill>
@@ -12175,6 +13519,2230 @@
                 <a:ea typeface="Yu Gothic" pitchFamily="34" charset="-122"/>
                 <a:cs typeface="Yu Gothic" pitchFamily="34" charset="-120"/>
               </a:rPr>
+              <a:t>9.5　IP</a:t>
+            </a:r>
+            <a:endParaRPr lang="en-US" sz="1200" dirty="0"/>
+          </a:p>
+        </p:txBody>
+      </p:sp>
+      <p:sp>
+        <p:nvSpPr>
+          <p:cNvPr id="3" name="Text 1"/>
+          <p:cNvSpPr/>
+          <p:nvPr/>
+        </p:nvSpPr>
+        <p:spPr>
+          <a:xfrm>
+            <a:off x="548640" y="603504"/>
+            <a:ext cx="11064240" cy="731520"/>
+          </a:xfrm>
+          <a:prstGeom prst="rect">
+            <a:avLst/>
+          </a:prstGeom>
+          <a:noFill/>
+          <a:ln/>
+        </p:spPr>
+        <p:txBody>
+          <a:bodyPr wrap="square" lIns="0" tIns="0" rIns="0" bIns="0" rtlCol="0" anchor="t"/>
+          <a:lstStyle/>
+          <a:p>
+            <a:pPr indent="0" marL="0">
+              <a:buNone/>
+            </a:pPr>
+            <a:r>
+              <a:rPr lang="en-US" sz="3000" b="1" dirty="0">
+                <a:solidFill>
+                  <a:srgbClr val="16191D"/>
+                </a:solidFill>
+                <a:latin typeface="Yu Gothic" pitchFamily="34" charset="0"/>
+                <a:ea typeface="Yu Gothic" pitchFamily="34" charset="-122"/>
+                <a:cs typeface="Yu Gothic" pitchFamily="34" charset="-120"/>
+              </a:rPr>
+              <a:t>IPv4 アドレスは2つの部分に分かれる</a:t>
+            </a:r>
+            <a:endParaRPr lang="en-US" sz="3000" dirty="0"/>
+          </a:p>
+        </p:txBody>
+      </p:sp>
+      <p:sp>
+        <p:nvSpPr>
+          <p:cNvPr id="4" name="Text 2"/>
+          <p:cNvSpPr/>
+          <p:nvPr/>
+        </p:nvSpPr>
+        <p:spPr>
+          <a:xfrm>
+            <a:off x="11247120" y="6355080"/>
+            <a:ext cx="548640" cy="274320"/>
+          </a:xfrm>
+          <a:prstGeom prst="rect">
+            <a:avLst/>
+          </a:prstGeom>
+          <a:noFill/>
+          <a:ln/>
+        </p:spPr>
+        <p:txBody>
+          <a:bodyPr wrap="square" lIns="0" tIns="0" rIns="0" bIns="0" rtlCol="0" anchor="ctr"/>
+          <a:lstStyle/>
+          <a:p>
+            <a:pPr algn="r" indent="0" marL="0">
+              <a:buNone/>
+            </a:pPr>
+            <a:r>
+              <a:rPr lang="en-US" sz="1000" dirty="0">
+                <a:solidFill>
+                  <a:srgbClr val="5F6672"/>
+                </a:solidFill>
+                <a:latin typeface="Yu Gothic" pitchFamily="34" charset="0"/>
+                <a:ea typeface="Yu Gothic" pitchFamily="34" charset="-122"/>
+                <a:cs typeface="Yu Gothic" pitchFamily="34" charset="-120"/>
+              </a:rPr>
+              <a:t>22</a:t>
+            </a:r>
+            <a:endParaRPr lang="en-US" sz="1000" dirty="0"/>
+          </a:p>
+        </p:txBody>
+      </p:sp>
+      <p:sp>
+        <p:nvSpPr>
+          <p:cNvPr id="5" name="Text 3"/>
+          <p:cNvSpPr/>
+          <p:nvPr/>
+        </p:nvSpPr>
+        <p:spPr>
+          <a:xfrm>
+            <a:off x="685800" y="1481328"/>
+            <a:ext cx="10789920" cy="365760"/>
+          </a:xfrm>
+          <a:prstGeom prst="rect">
+            <a:avLst/>
+          </a:prstGeom>
+          <a:noFill/>
+          <a:ln/>
+        </p:spPr>
+        <p:txBody>
+          <a:bodyPr wrap="square" lIns="0" tIns="0" rIns="0" bIns="0" rtlCol="0" anchor="ctr"/>
+          <a:lstStyle/>
+          <a:p>
+            <a:pPr indent="0" marL="0">
+              <a:lnSpc>
+                <a:spcPts val="2200"/>
+              </a:lnSpc>
+              <a:buNone/>
+            </a:pPr>
+            <a:r>
+              <a:rPr lang="en-US" sz="1500" dirty="0">
+                <a:solidFill>
+                  <a:srgbClr val="16191D"/>
+                </a:solidFill>
+                <a:latin typeface="Yu Gothic" pitchFamily="34" charset="0"/>
+                <a:ea typeface="Yu Gothic" pitchFamily="34" charset="-122"/>
+                <a:cs typeface="Yu Gothic" pitchFamily="34" charset="-120"/>
+              </a:rPr>
+              <a:t>IPv4 アドレスは32ビット、全部で約43億個。境界を示すのがサブネットマスクである。</a:t>
+            </a:r>
+            <a:endParaRPr lang="en-US" sz="1500" dirty="0"/>
+          </a:p>
+        </p:txBody>
+      </p:sp>
+      <p:sp>
+        <p:nvSpPr>
+          <p:cNvPr id="6" name="Text 4"/>
+          <p:cNvSpPr/>
+          <p:nvPr/>
+        </p:nvSpPr>
+        <p:spPr>
+          <a:xfrm>
+            <a:off x="685800" y="1883664"/>
+            <a:ext cx="5166360" cy="292608"/>
+          </a:xfrm>
+          <a:prstGeom prst="rect">
+            <a:avLst/>
+          </a:prstGeom>
+          <a:noFill/>
+          <a:ln/>
+        </p:spPr>
+        <p:txBody>
+          <a:bodyPr wrap="square" lIns="0" tIns="0" rIns="0" bIns="0" rtlCol="0" anchor="ctr"/>
+          <a:lstStyle/>
+          <a:p>
+            <a:pPr indent="0" marL="0">
+              <a:buNone/>
+            </a:pPr>
+            <a:r>
+              <a:rPr lang="en-US" sz="1500" b="1" dirty="0">
+                <a:solidFill>
+                  <a:srgbClr val="16191D"/>
+                </a:solidFill>
+                <a:latin typeface="Yu Gothic" pitchFamily="34" charset="0"/>
+                <a:ea typeface="Yu Gothic" pitchFamily="34" charset="-122"/>
+                <a:cs typeface="Yu Gothic" pitchFamily="34" charset="-120"/>
+              </a:rPr>
+              <a:t>192.0.2.130/24 の内訳</a:t>
+            </a:r>
+            <a:endParaRPr lang="en-US" sz="1500" dirty="0"/>
+          </a:p>
+        </p:txBody>
+      </p:sp>
+      <p:sp>
+        <p:nvSpPr>
+          <p:cNvPr id="7" name="Shape 5"/>
+          <p:cNvSpPr/>
+          <p:nvPr/>
+        </p:nvSpPr>
+        <p:spPr>
+          <a:xfrm>
+            <a:off x="685800" y="2286000"/>
+            <a:ext cx="5166360" cy="1920240"/>
+          </a:xfrm>
+          <a:prstGeom prst="roundRect">
+            <a:avLst>
+              <a:gd name="adj" fmla="val 1905"/>
+            </a:avLst>
+          </a:prstGeom>
+          <a:solidFill>
+            <a:srgbClr val="F5F7FA"/>
+          </a:solidFill>
+          <a:ln w="12700">
+            <a:solidFill>
+              <a:srgbClr val="DDE4EC"/>
+            </a:solidFill>
+            <a:prstDash val="solid"/>
+          </a:ln>
+        </p:spPr>
+      </p:sp>
+      <p:sp>
+        <p:nvSpPr>
+          <p:cNvPr id="8" name="Text 6"/>
+          <p:cNvSpPr/>
+          <p:nvPr/>
+        </p:nvSpPr>
+        <p:spPr>
+          <a:xfrm>
+            <a:off x="886968" y="2432304"/>
+            <a:ext cx="4764024" cy="1627632"/>
+          </a:xfrm>
+          <a:prstGeom prst="rect">
+            <a:avLst/>
+          </a:prstGeom>
+          <a:noFill/>
+          <a:ln/>
+        </p:spPr>
+        <p:txBody>
+          <a:bodyPr wrap="square" lIns="0" tIns="0" rIns="0" bIns="0" rtlCol="0" anchor="t"/>
+          <a:lstStyle/>
+          <a:p>
+            <a:pPr indent="0" marL="0">
+              <a:lnSpc>
+                <a:spcPts val="1575"/>
+              </a:lnSpc>
+              <a:buNone/>
+            </a:pPr>
+            <a:r>
+              <a:rPr lang="en-US" sz="1050" dirty="0">
+                <a:solidFill>
+                  <a:srgbClr val="16191D"/>
+                </a:solidFill>
+                <a:latin typeface="Courier New" pitchFamily="34" charset="0"/>
+                <a:ea typeface="Courier New" pitchFamily="34" charset="-122"/>
+                <a:cs typeface="Courier New" pitchFamily="34" charset="-120"/>
+              </a:rPr>
+              <a:t>アドレス  192.0.2.130</a:t>
+            </a:r>
+            <a:endParaRPr lang="en-US" sz="1050" dirty="0"/>
+          </a:p>
+          <a:p>
+            <a:pPr indent="0" marL="0">
+              <a:lnSpc>
+                <a:spcPts val="1575"/>
+              </a:lnSpc>
+              <a:buNone/>
+            </a:pPr>
+            <a:r>
+              <a:rPr lang="en-US" sz="1050" dirty="0">
+                <a:solidFill>
+                  <a:srgbClr val="16191D"/>
+                </a:solidFill>
+                <a:latin typeface="Courier New" pitchFamily="34" charset="0"/>
+                <a:ea typeface="Courier New" pitchFamily="34" charset="-122"/>
+                <a:cs typeface="Courier New" pitchFamily="34" charset="-120"/>
+              </a:rPr>
+              <a:t>  = 11000000 00000000 00000010 10000010</a:t>
+            </a:r>
+            <a:endParaRPr lang="en-US" sz="1050" dirty="0"/>
+          </a:p>
+          <a:p>
+            <a:pPr indent="0" marL="0">
+              <a:lnSpc>
+                <a:spcPts val="1575"/>
+              </a:lnSpc>
+              <a:buNone/>
+            </a:pPr>
+            <a:r>
+              <a:rPr lang="en-US" sz="1050" dirty="0">
+                <a:solidFill>
+                  <a:srgbClr val="16191D"/>
+                </a:solidFill>
+                <a:latin typeface="Courier New" pitchFamily="34" charset="0"/>
+                <a:ea typeface="Courier New" pitchFamily="34" charset="-122"/>
+                <a:cs typeface="Courier New" pitchFamily="34" charset="-120"/>
+              </a:rPr>
+              <a:t>マスク /24</a:t>
+            </a:r>
+            <a:endParaRPr lang="en-US" sz="1050" dirty="0"/>
+          </a:p>
+          <a:p>
+            <a:pPr indent="0" marL="0">
+              <a:lnSpc>
+                <a:spcPts val="1575"/>
+              </a:lnSpc>
+              <a:buNone/>
+            </a:pPr>
+            <a:r>
+              <a:rPr lang="en-US" sz="1050" dirty="0">
+                <a:solidFill>
+                  <a:srgbClr val="16191D"/>
+                </a:solidFill>
+                <a:latin typeface="Courier New" pitchFamily="34" charset="0"/>
+                <a:ea typeface="Courier New" pitchFamily="34" charset="-122"/>
+                <a:cs typeface="Courier New" pitchFamily="34" charset="-120"/>
+              </a:rPr>
+              <a:t>  = 11111111 11111111 11111111 00000000</a:t>
+            </a:r>
+            <a:endParaRPr lang="en-US" sz="1050" dirty="0"/>
+          </a:p>
+          <a:p>
+            <a:pPr indent="0" marL="0">
+              <a:lnSpc>
+                <a:spcPts val="1575"/>
+              </a:lnSpc>
+              <a:buNone/>
+            </a:pPr>
+            <a:r>
+              <a:rPr lang="en-US" sz="1050" dirty="0">
+                <a:solidFill>
+                  <a:srgbClr val="16191D"/>
+                </a:solidFill>
+                <a:latin typeface="Courier New" pitchFamily="34" charset="0"/>
+                <a:ea typeface="Courier New" pitchFamily="34" charset="-122"/>
+                <a:cs typeface="Courier New" pitchFamily="34" charset="-120"/>
+              </a:rPr>
+              <a:t>ネットワーク  192.0.2.0</a:t>
+            </a:r>
+            <a:endParaRPr lang="en-US" sz="1050" dirty="0"/>
+          </a:p>
+          <a:p>
+            <a:pPr indent="0" marL="0">
+              <a:lnSpc>
+                <a:spcPts val="1575"/>
+              </a:lnSpc>
+              <a:buNone/>
+            </a:pPr>
+            <a:r>
+              <a:rPr lang="en-US" sz="1050" dirty="0">
+                <a:solidFill>
+                  <a:srgbClr val="16191D"/>
+                </a:solidFill>
+                <a:latin typeface="Courier New" pitchFamily="34" charset="0"/>
+                <a:ea typeface="Courier New" pitchFamily="34" charset="-122"/>
+                <a:cs typeface="Courier New" pitchFamily="34" charset="-120"/>
+              </a:rPr>
+              <a:t>ホスト部      .130</a:t>
+            </a:r>
+            <a:endParaRPr lang="en-US" sz="1050" dirty="0"/>
+          </a:p>
+        </p:txBody>
+      </p:sp>
+      <p:sp>
+        <p:nvSpPr>
+          <p:cNvPr id="9" name="Text 7"/>
+          <p:cNvSpPr/>
+          <p:nvPr/>
+        </p:nvSpPr>
+        <p:spPr>
+          <a:xfrm>
+            <a:off x="6309360" y="1883664"/>
+            <a:ext cx="5166360" cy="292608"/>
+          </a:xfrm>
+          <a:prstGeom prst="rect">
+            <a:avLst/>
+          </a:prstGeom>
+          <a:noFill/>
+          <a:ln/>
+        </p:spPr>
+        <p:txBody>
+          <a:bodyPr wrap="square" lIns="0" tIns="0" rIns="0" bIns="0" rtlCol="0" anchor="ctr"/>
+          <a:lstStyle/>
+          <a:p>
+            <a:pPr indent="0" marL="0">
+              <a:buNone/>
+            </a:pPr>
+            <a:r>
+              <a:rPr lang="en-US" sz="1500" b="1" dirty="0">
+                <a:solidFill>
+                  <a:srgbClr val="16191D"/>
+                </a:solidFill>
+                <a:latin typeface="Yu Gothic" pitchFamily="34" charset="0"/>
+                <a:ea typeface="Yu Gothic" pitchFamily="34" charset="-122"/>
+                <a:cs typeface="Yu Gothic" pitchFamily="34" charset="-120"/>
+              </a:rPr>
+              <a:t>なぜ階層構造にするのか</a:t>
+            </a:r>
+            <a:endParaRPr lang="en-US" sz="1500" dirty="0"/>
+          </a:p>
+        </p:txBody>
+      </p:sp>
+      <p:sp>
+        <p:nvSpPr>
+          <p:cNvPr id="10" name="Text 8"/>
+          <p:cNvSpPr/>
+          <p:nvPr/>
+        </p:nvSpPr>
+        <p:spPr>
+          <a:xfrm>
+            <a:off x="6309360" y="2286000"/>
+            <a:ext cx="5166360" cy="1554480"/>
+          </a:xfrm>
+          <a:prstGeom prst="rect">
+            <a:avLst/>
+          </a:prstGeom>
+          <a:noFill/>
+          <a:ln/>
+        </p:spPr>
+        <p:txBody>
+          <a:bodyPr wrap="square" lIns="0" tIns="0" rIns="0" bIns="0" rtlCol="0" anchor="t"/>
+          <a:lstStyle/>
+          <a:p>
+            <a:pPr indent="0" marL="0">
+              <a:lnSpc>
+                <a:spcPts val="2000"/>
+              </a:lnSpc>
+              <a:buNone/>
+            </a:pPr>
+            <a:r>
+              <a:rPr lang="en-US" sz="1300" dirty="0">
+                <a:solidFill>
+                  <a:srgbClr val="5F6672"/>
+                </a:solidFill>
+                <a:latin typeface="Yu Gothic" pitchFamily="34" charset="0"/>
+                <a:ea typeface="Yu Gothic" pitchFamily="34" charset="-122"/>
+                <a:cs typeface="Yu Gothic" pitchFamily="34" charset="-120"/>
+              </a:rPr>
+              <a:t>経路表を小さくするため。世界中の43億個を1つずつ覚えることはできないが、「192.0.2.0/24 宛はあちらへ」とまとめれば1行で256個分を表せる。</a:t>
+            </a:r>
+            <a:endParaRPr lang="en-US" sz="1300" dirty="0"/>
+          </a:p>
+        </p:txBody>
+      </p:sp>
+      <p:sp>
+        <p:nvSpPr>
+          <p:cNvPr id="11" name="Text 9"/>
+          <p:cNvSpPr/>
+          <p:nvPr/>
+        </p:nvSpPr>
+        <p:spPr>
+          <a:xfrm>
+            <a:off x="6309360" y="3913632"/>
+            <a:ext cx="5166360" cy="320040"/>
+          </a:xfrm>
+          <a:prstGeom prst="rect">
+            <a:avLst/>
+          </a:prstGeom>
+          <a:noFill/>
+          <a:ln/>
+        </p:spPr>
+        <p:txBody>
+          <a:bodyPr wrap="square" lIns="0" tIns="0" rIns="0" bIns="0" rtlCol="0" anchor="ctr"/>
+          <a:lstStyle/>
+          <a:p>
+            <a:pPr indent="0" marL="0">
+              <a:buNone/>
+            </a:pPr>
+            <a:r>
+              <a:rPr lang="en-US" sz="1300" b="1" dirty="0">
+                <a:solidFill>
+                  <a:srgbClr val="0B5CAD"/>
+                </a:solidFill>
+                <a:latin typeface="Yu Gothic" pitchFamily="34" charset="0"/>
+                <a:ea typeface="Yu Gothic" pitchFamily="34" charset="-122"/>
+                <a:cs typeface="Yu Gothic" pitchFamily="34" charset="-120"/>
+              </a:rPr>
+              <a:t>割り当てられるのは 254 個</a:t>
+            </a:r>
+            <a:endParaRPr lang="en-US" sz="1300" dirty="0"/>
+          </a:p>
+        </p:txBody>
+      </p:sp>
+      <p:sp>
+        <p:nvSpPr>
+          <p:cNvPr id="12" name="Text 10"/>
+          <p:cNvSpPr/>
+          <p:nvPr/>
+        </p:nvSpPr>
+        <p:spPr>
+          <a:xfrm>
+            <a:off x="685800" y="5394960"/>
+            <a:ext cx="10789920" cy="512064"/>
+          </a:xfrm>
+          <a:prstGeom prst="rect">
+            <a:avLst/>
+          </a:prstGeom>
+          <a:noFill/>
+          <a:ln/>
+        </p:spPr>
+        <p:txBody>
+          <a:bodyPr wrap="square" lIns="0" tIns="0" rIns="0" bIns="0" rtlCol="0" anchor="ctr"/>
+          <a:lstStyle/>
+          <a:p>
+            <a:pPr indent="0" marL="0">
+              <a:lnSpc>
+                <a:spcPts val="1900"/>
+              </a:lnSpc>
+              <a:buNone/>
+            </a:pPr>
+            <a:r>
+              <a:rPr lang="en-US" sz="1300" b="1" dirty="0">
+                <a:solidFill>
+                  <a:srgbClr val="0B5CAD"/>
+                </a:solidFill>
+                <a:latin typeface="Yu Gothic" pitchFamily="34" charset="0"/>
+                <a:ea typeface="Yu Gothic" pitchFamily="34" charset="-122"/>
+                <a:cs typeface="Yu Gothic" pitchFamily="34" charset="-120"/>
+              </a:rPr>
+              <a:t>先頭（ネットワーク自体）と末尾（ブロードキャスト）は使えない。9.4 の「IP は住所」とはこの階層性のことである。</a:t>
+            </a:r>
+            <a:endParaRPr lang="en-US" sz="1300" dirty="0"/>
+          </a:p>
+        </p:txBody>
+      </p:sp>
+    </p:spTree>
+  </p:cSld>
+  <p:clrMapOvr>
+    <a:masterClrMapping/>
+  </p:clrMapOvr>
+</p:sld>
+</file>
+
+<file path=ppt/slides/slide23.xml><?xml version="1.0" encoding="utf-8"?>
+<p:sld xmlns:a="http://schemas.openxmlformats.org/drawingml/2006/main" xmlns:r="http://schemas.openxmlformats.org/officeDocument/2006/relationships" xmlns:p="http://schemas.openxmlformats.org/presentationml/2006/main">
+  <p:cSld name="Slide 23">
+    <p:bg>
+      <p:bgPr>
+        <a:solidFill>
+          <a:srgbClr val="FFFFFF"/>
+        </a:solidFill>
+      </p:bgPr>
+    </p:bg>
+    <p:spTree>
+      <p:nvGrpSpPr>
+        <p:cNvPr id="1" name=""/>
+        <p:cNvGrpSpPr/>
+        <p:nvPr/>
+      </p:nvGrpSpPr>
+      <p:grpSpPr>
+        <a:xfrm>
+          <a:off x="0" y="0"/>
+          <a:ext cx="0" cy="0"/>
+          <a:chOff x="0" y="0"/>
+          <a:chExt cx="0" cy="0"/>
+        </a:xfrm>
+      </p:grpSpPr>
+      <p:sp>
+        <p:nvSpPr>
+          <p:cNvPr id="2" name="Text 0"/>
+          <p:cNvSpPr/>
+          <p:nvPr/>
+        </p:nvSpPr>
+        <p:spPr>
+          <a:xfrm>
+            <a:off x="566928" y="310896"/>
+            <a:ext cx="4572000" cy="256032"/>
+          </a:xfrm>
+          <a:prstGeom prst="rect">
+            <a:avLst/>
+          </a:prstGeom>
+          <a:noFill/>
+          <a:ln/>
+        </p:spPr>
+        <p:txBody>
+          <a:bodyPr wrap="square" lIns="0" tIns="0" rIns="0" bIns="0" rtlCol="0" anchor="ctr"/>
+          <a:lstStyle/>
+          <a:p>
+            <a:pPr indent="0" marL="0">
+              <a:buNone/>
+            </a:pPr>
+            <a:r>
+              <a:rPr lang="en-US" sz="1200" b="1" dirty="0">
+                <a:solidFill>
+                  <a:srgbClr val="0B5CAD"/>
+                </a:solidFill>
+                <a:latin typeface="Yu Gothic" pitchFamily="34" charset="0"/>
+                <a:ea typeface="Yu Gothic" pitchFamily="34" charset="-122"/>
+                <a:cs typeface="Yu Gothic" pitchFamily="34" charset="-120"/>
+              </a:rPr>
+              <a:t>9.5　IP</a:t>
+            </a:r>
+            <a:endParaRPr lang="en-US" sz="1200" dirty="0"/>
+          </a:p>
+        </p:txBody>
+      </p:sp>
+      <p:sp>
+        <p:nvSpPr>
+          <p:cNvPr id="3" name="Text 1"/>
+          <p:cNvSpPr/>
+          <p:nvPr/>
+        </p:nvSpPr>
+        <p:spPr>
+          <a:xfrm>
+            <a:off x="548640" y="603504"/>
+            <a:ext cx="11064240" cy="731520"/>
+          </a:xfrm>
+          <a:prstGeom prst="rect">
+            <a:avLst/>
+          </a:prstGeom>
+          <a:noFill/>
+          <a:ln/>
+        </p:spPr>
+        <p:txBody>
+          <a:bodyPr wrap="square" lIns="0" tIns="0" rIns="0" bIns="0" rtlCol="0" anchor="t"/>
+          <a:lstStyle/>
+          <a:p>
+            <a:pPr indent="0" marL="0">
+              <a:buNone/>
+            </a:pPr>
+            <a:r>
+              <a:rPr lang="en-US" sz="3000" b="1" dirty="0">
+                <a:solidFill>
+                  <a:srgbClr val="16191D"/>
+                </a:solidFill>
+                <a:latin typeface="Yu Gothic" pitchFamily="34" charset="0"/>
+                <a:ea typeface="Yu Gothic" pitchFamily="34" charset="-122"/>
+                <a:cs typeface="Yu Gothic" pitchFamily="34" charset="-120"/>
+              </a:rPr>
+              <a:t>ルーティング：最長一致で選ぶ</a:t>
+            </a:r>
+            <a:endParaRPr lang="en-US" sz="3000" dirty="0"/>
+          </a:p>
+        </p:txBody>
+      </p:sp>
+      <p:sp>
+        <p:nvSpPr>
+          <p:cNvPr id="4" name="Text 2"/>
+          <p:cNvSpPr/>
+          <p:nvPr/>
+        </p:nvSpPr>
+        <p:spPr>
+          <a:xfrm>
+            <a:off x="11247120" y="6355080"/>
+            <a:ext cx="548640" cy="274320"/>
+          </a:xfrm>
+          <a:prstGeom prst="rect">
+            <a:avLst/>
+          </a:prstGeom>
+          <a:noFill/>
+          <a:ln/>
+        </p:spPr>
+        <p:txBody>
+          <a:bodyPr wrap="square" lIns="0" tIns="0" rIns="0" bIns="0" rtlCol="0" anchor="ctr"/>
+          <a:lstStyle/>
+          <a:p>
+            <a:pPr algn="r" indent="0" marL="0">
+              <a:buNone/>
+            </a:pPr>
+            <a:r>
+              <a:rPr lang="en-US" sz="1000" dirty="0">
+                <a:solidFill>
+                  <a:srgbClr val="5F6672"/>
+                </a:solidFill>
+                <a:latin typeface="Yu Gothic" pitchFamily="34" charset="0"/>
+                <a:ea typeface="Yu Gothic" pitchFamily="34" charset="-122"/>
+                <a:cs typeface="Yu Gothic" pitchFamily="34" charset="-120"/>
+              </a:rPr>
+              <a:t>23</a:t>
+            </a:r>
+            <a:endParaRPr lang="en-US" sz="1000" dirty="0"/>
+          </a:p>
+        </p:txBody>
+      </p:sp>
+      <p:sp>
+        <p:nvSpPr>
+          <p:cNvPr id="5" name="Text 3"/>
+          <p:cNvSpPr/>
+          <p:nvPr/>
+        </p:nvSpPr>
+        <p:spPr>
+          <a:xfrm>
+            <a:off x="685800" y="1481328"/>
+            <a:ext cx="10789920" cy="365760"/>
+          </a:xfrm>
+          <a:prstGeom prst="rect">
+            <a:avLst/>
+          </a:prstGeom>
+          <a:noFill/>
+          <a:ln/>
+        </p:spPr>
+        <p:txBody>
+          <a:bodyPr wrap="square" lIns="0" tIns="0" rIns="0" bIns="0" rtlCol="0" anchor="ctr"/>
+          <a:lstStyle/>
+          <a:p>
+            <a:pPr indent="0" marL="0">
+              <a:lnSpc>
+                <a:spcPts val="2200"/>
+              </a:lnSpc>
+              <a:buNone/>
+            </a:pPr>
+            <a:r>
+              <a:rPr lang="en-US" sz="1500" dirty="0">
+                <a:solidFill>
+                  <a:srgbClr val="16191D"/>
+                </a:solidFill>
+                <a:latin typeface="Yu Gothic" pitchFamily="34" charset="0"/>
+                <a:ea typeface="Yu Gothic" pitchFamily="34" charset="-122"/>
+                <a:cs typeface="Yu Gothic" pitchFamily="34" charset="-120"/>
+              </a:rPr>
+              <a:t>ルータは複数のネットワークにまたがって接続され、経路表を引いて次のルータへ渡す。</a:t>
+            </a:r>
+            <a:endParaRPr lang="en-US" sz="1500" dirty="0"/>
+          </a:p>
+        </p:txBody>
+      </p:sp>
+      <p:graphicFrame>
+        <p:nvGraphicFramePr>
+          <p:cNvPr id="24" name="Table 0"/>
+          <p:cNvGraphicFramePr>
+            <a:graphicFrameLocks noGrp="1"/>
+          </p:cNvGraphicFramePr>
+          <p:nvPr>
+            <p:extLst>
+              <p:ext uri="{D42A27DB-BD31-4B8C-83A1-F6EECF244321}">
+                <p14:modId xmlns:p14="http://schemas.microsoft.com/office/powerpoint/2010/main" val="1579011935"/>
+              </p:ext>
+            </p:extLst>
+          </p:nvPr>
+        </p:nvGraphicFramePr>
+        <p:xfrm>
+          <a:off x="685800" y="1883664"/>
+          <a:ext cx="10789920" cy="914400"/>
+        </p:xfrm>
+        <a:graphic>
+          <a:graphicData uri="http://schemas.openxmlformats.org/drawingml/2006/table">
+            <a:tbl>
+              <a:tblPr/>
+              <a:tblGrid>
+                <a:gridCol w="4023360"/>
+                <a:gridCol w="3474720"/>
+                <a:gridCol w="3291840"/>
+              </a:tblGrid>
+              <a:tr h="402336">
+                <a:tc>
+                  <a:txBody>
+                    <a:bodyPr/>
+                    <a:lstStyle/>
+                    <a:p>
+                      <a:pPr algn="l" indent="0" marL="0">
+                        <a:buNone/>
+                      </a:pPr>
+                      <a:r>
+                        <a:rPr lang="en-US" sz="1300" b="1" dirty="0">
+                          <a:solidFill>
+                            <a:srgbClr val="000000"/>
+                          </a:solidFill>
+                          <a:latin typeface="Yu Gothic" pitchFamily="34" charset="0"/>
+                          <a:ea typeface="Yu Gothic" pitchFamily="34" charset="-122"/>
+                          <a:cs typeface="Yu Gothic" pitchFamily="34" charset="-120"/>
+                        </a:rPr>
+                        <a:t>宛先ネットワーク</a:t>
+                      </a:r>
+                      <a:endParaRPr lang="en-US" sz="1300" dirty="0">
+                        <a:latin typeface="Yu Gothic" charset="0"/>
+                        <a:ea typeface="Yu Gothic" charset="0"/>
+                        <a:cs typeface="Yu Gothic" charset="0"/>
+                      </a:endParaRPr>
+                    </a:p>
+                  </a:txBody>
+                  <a:tcPr marL="91440" marR="91440" marT="45720" marB="45720" anchor="ctr">
+                    <a:lnL w="12700" cap="flat" cmpd="sng" algn="ctr">
+                      <a:solidFill>
+                        <a:srgbClr val="DDE4EC"/>
+                      </a:solidFill>
+                      <a:prstDash val="solid"/>
+                      <a:round/>
+                      <a:headEnd type="none" w="med" len="med"/>
+                      <a:tailEnd type="none" w="med" len="med"/>
+                    </a:lnL>
+                    <a:lnR w="12700" cap="flat" cmpd="sng" algn="ctr">
+                      <a:solidFill>
+                        <a:srgbClr val="DDE4EC"/>
+                      </a:solidFill>
+                      <a:prstDash val="solid"/>
+                      <a:round/>
+                      <a:headEnd type="none" w="med" len="med"/>
+                      <a:tailEnd type="none" w="med" len="med"/>
+                    </a:lnR>
+                    <a:lnT w="12700" cap="flat" cmpd="sng" algn="ctr">
+                      <a:solidFill>
+                        <a:srgbClr val="DDE4EC"/>
+                      </a:solidFill>
+                      <a:prstDash val="solid"/>
+                      <a:round/>
+                      <a:headEnd type="none" w="med" len="med"/>
+                      <a:tailEnd type="none" w="med" len="med"/>
+                    </a:lnT>
+                    <a:lnB w="12700" cap="flat" cmpd="sng" algn="ctr">
+                      <a:solidFill>
+                        <a:srgbClr val="DDE4EC"/>
+                      </a:solidFill>
+                      <a:prstDash val="solid"/>
+                      <a:round/>
+                      <a:headEnd type="none" w="med" len="med"/>
+                      <a:tailEnd type="none" w="med" len="med"/>
+                    </a:lnB>
+                    <a:solidFill>
+                      <a:srgbClr val="EEF1F5"/>
+                    </a:solidFill>
+                  </a:tcPr>
+                </a:tc>
+                <a:tc>
+                  <a:txBody>
+                    <a:bodyPr/>
+                    <a:lstStyle/>
+                    <a:p>
+                      <a:pPr algn="l" indent="0" marL="0">
+                        <a:buNone/>
+                      </a:pPr>
+                      <a:r>
+                        <a:rPr lang="en-US" sz="1300" b="1" dirty="0">
+                          <a:solidFill>
+                            <a:srgbClr val="000000"/>
+                          </a:solidFill>
+                          <a:latin typeface="Yu Gothic" pitchFamily="34" charset="0"/>
+                          <a:ea typeface="Yu Gothic" pitchFamily="34" charset="-122"/>
+                          <a:cs typeface="Yu Gothic" pitchFamily="34" charset="-120"/>
+                        </a:rPr>
+                        <a:t>次の転送先</a:t>
+                      </a:r>
+                      <a:endParaRPr lang="en-US" sz="1300" dirty="0">
+                        <a:latin typeface="Yu Gothic" charset="0"/>
+                        <a:ea typeface="Yu Gothic" charset="0"/>
+                        <a:cs typeface="Yu Gothic" charset="0"/>
+                      </a:endParaRPr>
+                    </a:p>
+                  </a:txBody>
+                  <a:tcPr marL="91440" marR="91440" marT="45720" marB="45720" anchor="ctr">
+                    <a:lnL w="12700" cap="flat" cmpd="sng" algn="ctr">
+                      <a:solidFill>
+                        <a:srgbClr val="DDE4EC"/>
+                      </a:solidFill>
+                      <a:prstDash val="solid"/>
+                      <a:round/>
+                      <a:headEnd type="none" w="med" len="med"/>
+                      <a:tailEnd type="none" w="med" len="med"/>
+                    </a:lnL>
+                    <a:lnR w="12700" cap="flat" cmpd="sng" algn="ctr">
+                      <a:solidFill>
+                        <a:srgbClr val="DDE4EC"/>
+                      </a:solidFill>
+                      <a:prstDash val="solid"/>
+                      <a:round/>
+                      <a:headEnd type="none" w="med" len="med"/>
+                      <a:tailEnd type="none" w="med" len="med"/>
+                    </a:lnR>
+                    <a:lnT w="12700" cap="flat" cmpd="sng" algn="ctr">
+                      <a:solidFill>
+                        <a:srgbClr val="DDE4EC"/>
+                      </a:solidFill>
+                      <a:prstDash val="solid"/>
+                      <a:round/>
+                      <a:headEnd type="none" w="med" len="med"/>
+                      <a:tailEnd type="none" w="med" len="med"/>
+                    </a:lnT>
+                    <a:lnB w="12700" cap="flat" cmpd="sng" algn="ctr">
+                      <a:solidFill>
+                        <a:srgbClr val="DDE4EC"/>
+                      </a:solidFill>
+                      <a:prstDash val="solid"/>
+                      <a:round/>
+                      <a:headEnd type="none" w="med" len="med"/>
+                      <a:tailEnd type="none" w="med" len="med"/>
+                    </a:lnB>
+                    <a:solidFill>
+                      <a:srgbClr val="EEF1F5"/>
+                    </a:solidFill>
+                  </a:tcPr>
+                </a:tc>
+                <a:tc>
+                  <a:txBody>
+                    <a:bodyPr/>
+                    <a:lstStyle/>
+                    <a:p>
+                      <a:pPr algn="l" indent="0" marL="0">
+                        <a:buNone/>
+                      </a:pPr>
+                      <a:r>
+                        <a:rPr lang="en-US" sz="1300" b="1" dirty="0">
+                          <a:solidFill>
+                            <a:srgbClr val="000000"/>
+                          </a:solidFill>
+                          <a:latin typeface="Yu Gothic" pitchFamily="34" charset="0"/>
+                          <a:ea typeface="Yu Gothic" pitchFamily="34" charset="-122"/>
+                          <a:cs typeface="Yu Gothic" pitchFamily="34" charset="-120"/>
+                        </a:rPr>
+                        <a:t>出ていくインタフェース</a:t>
+                      </a:r>
+                      <a:endParaRPr lang="en-US" sz="1300" dirty="0">
+                        <a:latin typeface="Yu Gothic" charset="0"/>
+                        <a:ea typeface="Yu Gothic" charset="0"/>
+                        <a:cs typeface="Yu Gothic" charset="0"/>
+                      </a:endParaRPr>
+                    </a:p>
+                  </a:txBody>
+                  <a:tcPr marL="91440" marR="91440" marT="45720" marB="45720" anchor="ctr">
+                    <a:lnL w="12700" cap="flat" cmpd="sng" algn="ctr">
+                      <a:solidFill>
+                        <a:srgbClr val="DDE4EC"/>
+                      </a:solidFill>
+                      <a:prstDash val="solid"/>
+                      <a:round/>
+                      <a:headEnd type="none" w="med" len="med"/>
+                      <a:tailEnd type="none" w="med" len="med"/>
+                    </a:lnL>
+                    <a:lnR w="12700" cap="flat" cmpd="sng" algn="ctr">
+                      <a:solidFill>
+                        <a:srgbClr val="DDE4EC"/>
+                      </a:solidFill>
+                      <a:prstDash val="solid"/>
+                      <a:round/>
+                      <a:headEnd type="none" w="med" len="med"/>
+                      <a:tailEnd type="none" w="med" len="med"/>
+                    </a:lnR>
+                    <a:lnT w="12700" cap="flat" cmpd="sng" algn="ctr">
+                      <a:solidFill>
+                        <a:srgbClr val="DDE4EC"/>
+                      </a:solidFill>
+                      <a:prstDash val="solid"/>
+                      <a:round/>
+                      <a:headEnd type="none" w="med" len="med"/>
+                      <a:tailEnd type="none" w="med" len="med"/>
+                    </a:lnT>
+                    <a:lnB w="12700" cap="flat" cmpd="sng" algn="ctr">
+                      <a:solidFill>
+                        <a:srgbClr val="DDE4EC"/>
+                      </a:solidFill>
+                      <a:prstDash val="solid"/>
+                      <a:round/>
+                      <a:headEnd type="none" w="med" len="med"/>
+                      <a:tailEnd type="none" w="med" len="med"/>
+                    </a:lnB>
+                    <a:solidFill>
+                      <a:srgbClr val="EEF1F5"/>
+                    </a:solidFill>
+                  </a:tcPr>
+                </a:tc>
+              </a:tr>
+              <a:tr h="402336">
+                <a:tc>
+                  <a:txBody>
+                    <a:bodyPr/>
+                    <a:lstStyle/>
+                    <a:p>
+                      <a:pPr algn="l" indent="0" marL="0">
+                        <a:buNone/>
+                      </a:pPr>
+                      <a:r>
+                        <a:rPr lang="en-US" sz="1300" dirty="0">
+                          <a:solidFill>
+                            <a:srgbClr val="000000"/>
+                          </a:solidFill>
+                          <a:latin typeface="Yu Gothic" pitchFamily="34" charset="0"/>
+                          <a:ea typeface="Yu Gothic" pitchFamily="34" charset="-122"/>
+                          <a:cs typeface="Yu Gothic" pitchFamily="34" charset="-120"/>
+                        </a:rPr>
+                        <a:t>192.0.2.0/24</a:t>
+                      </a:r>
+                      <a:endParaRPr lang="en-US" sz="1300" dirty="0">
+                        <a:latin typeface="Yu Gothic" charset="0"/>
+                        <a:ea typeface="Yu Gothic" charset="0"/>
+                        <a:cs typeface="Yu Gothic" charset="0"/>
+                      </a:endParaRPr>
+                    </a:p>
+                  </a:txBody>
+                  <a:tcPr marL="91440" marR="91440" marT="45720" marB="45720" anchor="ctr">
+                    <a:lnL w="12700" cap="flat" cmpd="sng" algn="ctr">
+                      <a:solidFill>
+                        <a:srgbClr val="DDE4EC"/>
+                      </a:solidFill>
+                      <a:prstDash val="solid"/>
+                      <a:round/>
+                      <a:headEnd type="none" w="med" len="med"/>
+                      <a:tailEnd type="none" w="med" len="med"/>
+                    </a:lnL>
+                    <a:lnR w="12700" cap="flat" cmpd="sng" algn="ctr">
+                      <a:solidFill>
+                        <a:srgbClr val="DDE4EC"/>
+                      </a:solidFill>
+                      <a:prstDash val="solid"/>
+                      <a:round/>
+                      <a:headEnd type="none" w="med" len="med"/>
+                      <a:tailEnd type="none" w="med" len="med"/>
+                    </a:lnR>
+                    <a:lnT w="12700" cap="flat" cmpd="sng" algn="ctr">
+                      <a:solidFill>
+                        <a:srgbClr val="DDE4EC"/>
+                      </a:solidFill>
+                      <a:prstDash val="solid"/>
+                      <a:round/>
+                      <a:headEnd type="none" w="med" len="med"/>
+                      <a:tailEnd type="none" w="med" len="med"/>
+                    </a:lnT>
+                    <a:lnB w="12700" cap="flat" cmpd="sng" algn="ctr">
+                      <a:solidFill>
+                        <a:srgbClr val="DDE4EC"/>
+                      </a:solidFill>
+                      <a:prstDash val="solid"/>
+                      <a:round/>
+                      <a:headEnd type="none" w="med" len="med"/>
+                      <a:tailEnd type="none" w="med" len="med"/>
+                    </a:lnB>
+                    <a:solidFill>
+                      <a:srgbClr val="FFFFFF"/>
+                    </a:solidFill>
+                  </a:tcPr>
+                </a:tc>
+                <a:tc>
+                  <a:txBody>
+                    <a:bodyPr/>
+                    <a:lstStyle/>
+                    <a:p>
+                      <a:pPr algn="l" indent="0" marL="0">
+                        <a:buNone/>
+                      </a:pPr>
+                      <a:r>
+                        <a:rPr lang="en-US" sz="1300" dirty="0">
+                          <a:solidFill>
+                            <a:srgbClr val="000000"/>
+                          </a:solidFill>
+                          <a:latin typeface="Yu Gothic" pitchFamily="34" charset="0"/>
+                          <a:ea typeface="Yu Gothic" pitchFamily="34" charset="-122"/>
+                          <a:cs typeface="Yu Gothic" pitchFamily="34" charset="-120"/>
+                        </a:rPr>
+                        <a:t>直接接続</a:t>
+                      </a:r>
+                      <a:endParaRPr lang="en-US" sz="1300" dirty="0">
+                        <a:latin typeface="Yu Gothic" charset="0"/>
+                        <a:ea typeface="Yu Gothic" charset="0"/>
+                        <a:cs typeface="Yu Gothic" charset="0"/>
+                      </a:endParaRPr>
+                    </a:p>
+                  </a:txBody>
+                  <a:tcPr marL="91440" marR="91440" marT="45720" marB="45720" anchor="ctr">
+                    <a:lnL w="12700" cap="flat" cmpd="sng" algn="ctr">
+                      <a:solidFill>
+                        <a:srgbClr val="DDE4EC"/>
+                      </a:solidFill>
+                      <a:prstDash val="solid"/>
+                      <a:round/>
+                      <a:headEnd type="none" w="med" len="med"/>
+                      <a:tailEnd type="none" w="med" len="med"/>
+                    </a:lnL>
+                    <a:lnR w="12700" cap="flat" cmpd="sng" algn="ctr">
+                      <a:solidFill>
+                        <a:srgbClr val="DDE4EC"/>
+                      </a:solidFill>
+                      <a:prstDash val="solid"/>
+                      <a:round/>
+                      <a:headEnd type="none" w="med" len="med"/>
+                      <a:tailEnd type="none" w="med" len="med"/>
+                    </a:lnR>
+                    <a:lnT w="12700" cap="flat" cmpd="sng" algn="ctr">
+                      <a:solidFill>
+                        <a:srgbClr val="DDE4EC"/>
+                      </a:solidFill>
+                      <a:prstDash val="solid"/>
+                      <a:round/>
+                      <a:headEnd type="none" w="med" len="med"/>
+                      <a:tailEnd type="none" w="med" len="med"/>
+                    </a:lnT>
+                    <a:lnB w="12700" cap="flat" cmpd="sng" algn="ctr">
+                      <a:solidFill>
+                        <a:srgbClr val="DDE4EC"/>
+                      </a:solidFill>
+                      <a:prstDash val="solid"/>
+                      <a:round/>
+                      <a:headEnd type="none" w="med" len="med"/>
+                      <a:tailEnd type="none" w="med" len="med"/>
+                    </a:lnB>
+                    <a:solidFill>
+                      <a:srgbClr val="FFFFFF"/>
+                    </a:solidFill>
+                  </a:tcPr>
+                </a:tc>
+                <a:tc>
+                  <a:txBody>
+                    <a:bodyPr/>
+                    <a:lstStyle/>
+                    <a:p>
+                      <a:pPr algn="l" indent="0" marL="0">
+                        <a:buNone/>
+                      </a:pPr>
+                      <a:r>
+                        <a:rPr lang="en-US" sz="1300" dirty="0">
+                          <a:solidFill>
+                            <a:srgbClr val="000000"/>
+                          </a:solidFill>
+                          <a:latin typeface="Yu Gothic" pitchFamily="34" charset="0"/>
+                          <a:ea typeface="Yu Gothic" pitchFamily="34" charset="-122"/>
+                          <a:cs typeface="Yu Gothic" pitchFamily="34" charset="-120"/>
+                        </a:rPr>
+                        <a:t>eth0</a:t>
+                      </a:r>
+                      <a:endParaRPr lang="en-US" sz="1300" dirty="0">
+                        <a:latin typeface="Yu Gothic" charset="0"/>
+                        <a:ea typeface="Yu Gothic" charset="0"/>
+                        <a:cs typeface="Yu Gothic" charset="0"/>
+                      </a:endParaRPr>
+                    </a:p>
+                  </a:txBody>
+                  <a:tcPr marL="91440" marR="91440" marT="45720" marB="45720" anchor="ctr">
+                    <a:lnL w="12700" cap="flat" cmpd="sng" algn="ctr">
+                      <a:solidFill>
+                        <a:srgbClr val="DDE4EC"/>
+                      </a:solidFill>
+                      <a:prstDash val="solid"/>
+                      <a:round/>
+                      <a:headEnd type="none" w="med" len="med"/>
+                      <a:tailEnd type="none" w="med" len="med"/>
+                    </a:lnL>
+                    <a:lnR w="12700" cap="flat" cmpd="sng" algn="ctr">
+                      <a:solidFill>
+                        <a:srgbClr val="DDE4EC"/>
+                      </a:solidFill>
+                      <a:prstDash val="solid"/>
+                      <a:round/>
+                      <a:headEnd type="none" w="med" len="med"/>
+                      <a:tailEnd type="none" w="med" len="med"/>
+                    </a:lnR>
+                    <a:lnT w="12700" cap="flat" cmpd="sng" algn="ctr">
+                      <a:solidFill>
+                        <a:srgbClr val="DDE4EC"/>
+                      </a:solidFill>
+                      <a:prstDash val="solid"/>
+                      <a:round/>
+                      <a:headEnd type="none" w="med" len="med"/>
+                      <a:tailEnd type="none" w="med" len="med"/>
+                    </a:lnT>
+                    <a:lnB w="12700" cap="flat" cmpd="sng" algn="ctr">
+                      <a:solidFill>
+                        <a:srgbClr val="DDE4EC"/>
+                      </a:solidFill>
+                      <a:prstDash val="solid"/>
+                      <a:round/>
+                      <a:headEnd type="none" w="med" len="med"/>
+                      <a:tailEnd type="none" w="med" len="med"/>
+                    </a:lnB>
+                    <a:solidFill>
+                      <a:srgbClr val="FFFFFF"/>
+                    </a:solidFill>
+                  </a:tcPr>
+                </a:tc>
+              </a:tr>
+              <a:tr h="402336">
+                <a:tc>
+                  <a:txBody>
+                    <a:bodyPr/>
+                    <a:lstStyle/>
+                    <a:p>
+                      <a:pPr algn="l" indent="0" marL="0">
+                        <a:buNone/>
+                      </a:pPr>
+                      <a:r>
+                        <a:rPr lang="en-US" sz="1300" dirty="0">
+                          <a:solidFill>
+                            <a:srgbClr val="000000"/>
+                          </a:solidFill>
+                          <a:latin typeface="Yu Gothic" pitchFamily="34" charset="0"/>
+                          <a:ea typeface="Yu Gothic" pitchFamily="34" charset="-122"/>
+                          <a:cs typeface="Yu Gothic" pitchFamily="34" charset="-120"/>
+                        </a:rPr>
+                        <a:t>198.51.100.0/24</a:t>
+                      </a:r>
+                      <a:endParaRPr lang="en-US" sz="1300" dirty="0">
+                        <a:latin typeface="Yu Gothic" charset="0"/>
+                        <a:ea typeface="Yu Gothic" charset="0"/>
+                        <a:cs typeface="Yu Gothic" charset="0"/>
+                      </a:endParaRPr>
+                    </a:p>
+                  </a:txBody>
+                  <a:tcPr marL="91440" marR="91440" marT="45720" marB="45720" anchor="ctr">
+                    <a:lnL w="12700" cap="flat" cmpd="sng" algn="ctr">
+                      <a:solidFill>
+                        <a:srgbClr val="DDE4EC"/>
+                      </a:solidFill>
+                      <a:prstDash val="solid"/>
+                      <a:round/>
+                      <a:headEnd type="none" w="med" len="med"/>
+                      <a:tailEnd type="none" w="med" len="med"/>
+                    </a:lnL>
+                    <a:lnR w="12700" cap="flat" cmpd="sng" algn="ctr">
+                      <a:solidFill>
+                        <a:srgbClr val="DDE4EC"/>
+                      </a:solidFill>
+                      <a:prstDash val="solid"/>
+                      <a:round/>
+                      <a:headEnd type="none" w="med" len="med"/>
+                      <a:tailEnd type="none" w="med" len="med"/>
+                    </a:lnR>
+                    <a:lnT w="12700" cap="flat" cmpd="sng" algn="ctr">
+                      <a:solidFill>
+                        <a:srgbClr val="DDE4EC"/>
+                      </a:solidFill>
+                      <a:prstDash val="solid"/>
+                      <a:round/>
+                      <a:headEnd type="none" w="med" len="med"/>
+                      <a:tailEnd type="none" w="med" len="med"/>
+                    </a:lnT>
+                    <a:lnB w="12700" cap="flat" cmpd="sng" algn="ctr">
+                      <a:solidFill>
+                        <a:srgbClr val="DDE4EC"/>
+                      </a:solidFill>
+                      <a:prstDash val="solid"/>
+                      <a:round/>
+                      <a:headEnd type="none" w="med" len="med"/>
+                      <a:tailEnd type="none" w="med" len="med"/>
+                    </a:lnB>
+                    <a:solidFill>
+                      <a:srgbClr val="FFFFFF"/>
+                    </a:solidFill>
+                  </a:tcPr>
+                </a:tc>
+                <a:tc>
+                  <a:txBody>
+                    <a:bodyPr/>
+                    <a:lstStyle/>
+                    <a:p>
+                      <a:pPr algn="l" indent="0" marL="0">
+                        <a:buNone/>
+                      </a:pPr>
+                      <a:r>
+                        <a:rPr lang="en-US" sz="1300" dirty="0">
+                          <a:solidFill>
+                            <a:srgbClr val="000000"/>
+                          </a:solidFill>
+                          <a:latin typeface="Yu Gothic" pitchFamily="34" charset="0"/>
+                          <a:ea typeface="Yu Gothic" pitchFamily="34" charset="-122"/>
+                          <a:cs typeface="Yu Gothic" pitchFamily="34" charset="-120"/>
+                        </a:rPr>
+                        <a:t>203.0.113.1</a:t>
+                      </a:r>
+                      <a:endParaRPr lang="en-US" sz="1300" dirty="0">
+                        <a:latin typeface="Yu Gothic" charset="0"/>
+                        <a:ea typeface="Yu Gothic" charset="0"/>
+                        <a:cs typeface="Yu Gothic" charset="0"/>
+                      </a:endParaRPr>
+                    </a:p>
+                  </a:txBody>
+                  <a:tcPr marL="91440" marR="91440" marT="45720" marB="45720" anchor="ctr">
+                    <a:lnL w="12700" cap="flat" cmpd="sng" algn="ctr">
+                      <a:solidFill>
+                        <a:srgbClr val="DDE4EC"/>
+                      </a:solidFill>
+                      <a:prstDash val="solid"/>
+                      <a:round/>
+                      <a:headEnd type="none" w="med" len="med"/>
+                      <a:tailEnd type="none" w="med" len="med"/>
+                    </a:lnL>
+                    <a:lnR w="12700" cap="flat" cmpd="sng" algn="ctr">
+                      <a:solidFill>
+                        <a:srgbClr val="DDE4EC"/>
+                      </a:solidFill>
+                      <a:prstDash val="solid"/>
+                      <a:round/>
+                      <a:headEnd type="none" w="med" len="med"/>
+                      <a:tailEnd type="none" w="med" len="med"/>
+                    </a:lnR>
+                    <a:lnT w="12700" cap="flat" cmpd="sng" algn="ctr">
+                      <a:solidFill>
+                        <a:srgbClr val="DDE4EC"/>
+                      </a:solidFill>
+                      <a:prstDash val="solid"/>
+                      <a:round/>
+                      <a:headEnd type="none" w="med" len="med"/>
+                      <a:tailEnd type="none" w="med" len="med"/>
+                    </a:lnT>
+                    <a:lnB w="12700" cap="flat" cmpd="sng" algn="ctr">
+                      <a:solidFill>
+                        <a:srgbClr val="DDE4EC"/>
+                      </a:solidFill>
+                      <a:prstDash val="solid"/>
+                      <a:round/>
+                      <a:headEnd type="none" w="med" len="med"/>
+                      <a:tailEnd type="none" w="med" len="med"/>
+                    </a:lnB>
+                    <a:solidFill>
+                      <a:srgbClr val="FFFFFF"/>
+                    </a:solidFill>
+                  </a:tcPr>
+                </a:tc>
+                <a:tc>
+                  <a:txBody>
+                    <a:bodyPr/>
+                    <a:lstStyle/>
+                    <a:p>
+                      <a:pPr algn="l" indent="0" marL="0">
+                        <a:buNone/>
+                      </a:pPr>
+                      <a:r>
+                        <a:rPr lang="en-US" sz="1300" dirty="0">
+                          <a:solidFill>
+                            <a:srgbClr val="000000"/>
+                          </a:solidFill>
+                          <a:latin typeface="Yu Gothic" pitchFamily="34" charset="0"/>
+                          <a:ea typeface="Yu Gothic" pitchFamily="34" charset="-122"/>
+                          <a:cs typeface="Yu Gothic" pitchFamily="34" charset="-120"/>
+                        </a:rPr>
+                        <a:t>eth1</a:t>
+                      </a:r>
+                      <a:endParaRPr lang="en-US" sz="1300" dirty="0">
+                        <a:latin typeface="Yu Gothic" charset="0"/>
+                        <a:ea typeface="Yu Gothic" charset="0"/>
+                        <a:cs typeface="Yu Gothic" charset="0"/>
+                      </a:endParaRPr>
+                    </a:p>
+                  </a:txBody>
+                  <a:tcPr marL="91440" marR="91440" marT="45720" marB="45720" anchor="ctr">
+                    <a:lnL w="12700" cap="flat" cmpd="sng" algn="ctr">
+                      <a:solidFill>
+                        <a:srgbClr val="DDE4EC"/>
+                      </a:solidFill>
+                      <a:prstDash val="solid"/>
+                      <a:round/>
+                      <a:headEnd type="none" w="med" len="med"/>
+                      <a:tailEnd type="none" w="med" len="med"/>
+                    </a:lnL>
+                    <a:lnR w="12700" cap="flat" cmpd="sng" algn="ctr">
+                      <a:solidFill>
+                        <a:srgbClr val="DDE4EC"/>
+                      </a:solidFill>
+                      <a:prstDash val="solid"/>
+                      <a:round/>
+                      <a:headEnd type="none" w="med" len="med"/>
+                      <a:tailEnd type="none" w="med" len="med"/>
+                    </a:lnR>
+                    <a:lnT w="12700" cap="flat" cmpd="sng" algn="ctr">
+                      <a:solidFill>
+                        <a:srgbClr val="DDE4EC"/>
+                      </a:solidFill>
+                      <a:prstDash val="solid"/>
+                      <a:round/>
+                      <a:headEnd type="none" w="med" len="med"/>
+                      <a:tailEnd type="none" w="med" len="med"/>
+                    </a:lnT>
+                    <a:lnB w="12700" cap="flat" cmpd="sng" algn="ctr">
+                      <a:solidFill>
+                        <a:srgbClr val="DDE4EC"/>
+                      </a:solidFill>
+                      <a:prstDash val="solid"/>
+                      <a:round/>
+                      <a:headEnd type="none" w="med" len="med"/>
+                      <a:tailEnd type="none" w="med" len="med"/>
+                    </a:lnB>
+                    <a:solidFill>
+                      <a:srgbClr val="FFFFFF"/>
+                    </a:solidFill>
+                  </a:tcPr>
+                </a:tc>
+              </a:tr>
+              <a:tr h="402336">
+                <a:tc>
+                  <a:txBody>
+                    <a:bodyPr/>
+                    <a:lstStyle/>
+                    <a:p>
+                      <a:pPr algn="l" indent="0" marL="0">
+                        <a:buNone/>
+                      </a:pPr>
+                      <a:r>
+                        <a:rPr lang="en-US" sz="1300" dirty="0">
+                          <a:solidFill>
+                            <a:srgbClr val="000000"/>
+                          </a:solidFill>
+                          <a:latin typeface="Yu Gothic" pitchFamily="34" charset="0"/>
+                          <a:ea typeface="Yu Gothic" pitchFamily="34" charset="-122"/>
+                          <a:cs typeface="Yu Gothic" pitchFamily="34" charset="-120"/>
+                        </a:rPr>
+                        <a:t>0.0.0.0/0（デフォルト）</a:t>
+                      </a:r>
+                      <a:endParaRPr lang="en-US" sz="1300" dirty="0">
+                        <a:latin typeface="Yu Gothic" charset="0"/>
+                        <a:ea typeface="Yu Gothic" charset="0"/>
+                        <a:cs typeface="Yu Gothic" charset="0"/>
+                      </a:endParaRPr>
+                    </a:p>
+                  </a:txBody>
+                  <a:tcPr marL="91440" marR="91440" marT="45720" marB="45720" anchor="ctr">
+                    <a:lnL w="12700" cap="flat" cmpd="sng" algn="ctr">
+                      <a:solidFill>
+                        <a:srgbClr val="DDE4EC"/>
+                      </a:solidFill>
+                      <a:prstDash val="solid"/>
+                      <a:round/>
+                      <a:headEnd type="none" w="med" len="med"/>
+                      <a:tailEnd type="none" w="med" len="med"/>
+                    </a:lnL>
+                    <a:lnR w="12700" cap="flat" cmpd="sng" algn="ctr">
+                      <a:solidFill>
+                        <a:srgbClr val="DDE4EC"/>
+                      </a:solidFill>
+                      <a:prstDash val="solid"/>
+                      <a:round/>
+                      <a:headEnd type="none" w="med" len="med"/>
+                      <a:tailEnd type="none" w="med" len="med"/>
+                    </a:lnR>
+                    <a:lnT w="12700" cap="flat" cmpd="sng" algn="ctr">
+                      <a:solidFill>
+                        <a:srgbClr val="DDE4EC"/>
+                      </a:solidFill>
+                      <a:prstDash val="solid"/>
+                      <a:round/>
+                      <a:headEnd type="none" w="med" len="med"/>
+                      <a:tailEnd type="none" w="med" len="med"/>
+                    </a:lnT>
+                    <a:lnB w="12700" cap="flat" cmpd="sng" algn="ctr">
+                      <a:solidFill>
+                        <a:srgbClr val="DDE4EC"/>
+                      </a:solidFill>
+                      <a:prstDash val="solid"/>
+                      <a:round/>
+                      <a:headEnd type="none" w="med" len="med"/>
+                      <a:tailEnd type="none" w="med" len="med"/>
+                    </a:lnB>
+                    <a:solidFill>
+                      <a:srgbClr val="FFFFFF"/>
+                    </a:solidFill>
+                  </a:tcPr>
+                </a:tc>
+                <a:tc>
+                  <a:txBody>
+                    <a:bodyPr/>
+                    <a:lstStyle/>
+                    <a:p>
+                      <a:pPr algn="l" indent="0" marL="0">
+                        <a:buNone/>
+                      </a:pPr>
+                      <a:r>
+                        <a:rPr lang="en-US" sz="1300" dirty="0">
+                          <a:solidFill>
+                            <a:srgbClr val="000000"/>
+                          </a:solidFill>
+                          <a:latin typeface="Yu Gothic" pitchFamily="34" charset="0"/>
+                          <a:ea typeface="Yu Gothic" pitchFamily="34" charset="-122"/>
+                          <a:cs typeface="Yu Gothic" pitchFamily="34" charset="-120"/>
+                        </a:rPr>
+                        <a:t>203.0.113.254</a:t>
+                      </a:r>
+                      <a:endParaRPr lang="en-US" sz="1300" dirty="0">
+                        <a:latin typeface="Yu Gothic" charset="0"/>
+                        <a:ea typeface="Yu Gothic" charset="0"/>
+                        <a:cs typeface="Yu Gothic" charset="0"/>
+                      </a:endParaRPr>
+                    </a:p>
+                  </a:txBody>
+                  <a:tcPr marL="91440" marR="91440" marT="45720" marB="45720" anchor="ctr">
+                    <a:lnL w="12700" cap="flat" cmpd="sng" algn="ctr">
+                      <a:solidFill>
+                        <a:srgbClr val="DDE4EC"/>
+                      </a:solidFill>
+                      <a:prstDash val="solid"/>
+                      <a:round/>
+                      <a:headEnd type="none" w="med" len="med"/>
+                      <a:tailEnd type="none" w="med" len="med"/>
+                    </a:lnL>
+                    <a:lnR w="12700" cap="flat" cmpd="sng" algn="ctr">
+                      <a:solidFill>
+                        <a:srgbClr val="DDE4EC"/>
+                      </a:solidFill>
+                      <a:prstDash val="solid"/>
+                      <a:round/>
+                      <a:headEnd type="none" w="med" len="med"/>
+                      <a:tailEnd type="none" w="med" len="med"/>
+                    </a:lnR>
+                    <a:lnT w="12700" cap="flat" cmpd="sng" algn="ctr">
+                      <a:solidFill>
+                        <a:srgbClr val="DDE4EC"/>
+                      </a:solidFill>
+                      <a:prstDash val="solid"/>
+                      <a:round/>
+                      <a:headEnd type="none" w="med" len="med"/>
+                      <a:tailEnd type="none" w="med" len="med"/>
+                    </a:lnT>
+                    <a:lnB w="12700" cap="flat" cmpd="sng" algn="ctr">
+                      <a:solidFill>
+                        <a:srgbClr val="DDE4EC"/>
+                      </a:solidFill>
+                      <a:prstDash val="solid"/>
+                      <a:round/>
+                      <a:headEnd type="none" w="med" len="med"/>
+                      <a:tailEnd type="none" w="med" len="med"/>
+                    </a:lnB>
+                    <a:solidFill>
+                      <a:srgbClr val="FFFFFF"/>
+                    </a:solidFill>
+                  </a:tcPr>
+                </a:tc>
+                <a:tc>
+                  <a:txBody>
+                    <a:bodyPr/>
+                    <a:lstStyle/>
+                    <a:p>
+                      <a:pPr algn="l" indent="0" marL="0">
+                        <a:buNone/>
+                      </a:pPr>
+                      <a:r>
+                        <a:rPr lang="en-US" sz="1300" dirty="0">
+                          <a:solidFill>
+                            <a:srgbClr val="000000"/>
+                          </a:solidFill>
+                          <a:latin typeface="Yu Gothic" pitchFamily="34" charset="0"/>
+                          <a:ea typeface="Yu Gothic" pitchFamily="34" charset="-122"/>
+                          <a:cs typeface="Yu Gothic" pitchFamily="34" charset="-120"/>
+                        </a:rPr>
+                        <a:t>eth1</a:t>
+                      </a:r>
+                      <a:endParaRPr lang="en-US" sz="1300" dirty="0">
+                        <a:latin typeface="Yu Gothic" charset="0"/>
+                        <a:ea typeface="Yu Gothic" charset="0"/>
+                        <a:cs typeface="Yu Gothic" charset="0"/>
+                      </a:endParaRPr>
+                    </a:p>
+                  </a:txBody>
+                  <a:tcPr marL="91440" marR="91440" marT="45720" marB="45720" anchor="ctr">
+                    <a:lnL w="12700" cap="flat" cmpd="sng" algn="ctr">
+                      <a:solidFill>
+                        <a:srgbClr val="DDE4EC"/>
+                      </a:solidFill>
+                      <a:prstDash val="solid"/>
+                      <a:round/>
+                      <a:headEnd type="none" w="med" len="med"/>
+                      <a:tailEnd type="none" w="med" len="med"/>
+                    </a:lnL>
+                    <a:lnR w="12700" cap="flat" cmpd="sng" algn="ctr">
+                      <a:solidFill>
+                        <a:srgbClr val="DDE4EC"/>
+                      </a:solidFill>
+                      <a:prstDash val="solid"/>
+                      <a:round/>
+                      <a:headEnd type="none" w="med" len="med"/>
+                      <a:tailEnd type="none" w="med" len="med"/>
+                    </a:lnR>
+                    <a:lnT w="12700" cap="flat" cmpd="sng" algn="ctr">
+                      <a:solidFill>
+                        <a:srgbClr val="DDE4EC"/>
+                      </a:solidFill>
+                      <a:prstDash val="solid"/>
+                      <a:round/>
+                      <a:headEnd type="none" w="med" len="med"/>
+                      <a:tailEnd type="none" w="med" len="med"/>
+                    </a:lnT>
+                    <a:lnB w="12700" cap="flat" cmpd="sng" algn="ctr">
+                      <a:solidFill>
+                        <a:srgbClr val="DDE4EC"/>
+                      </a:solidFill>
+                      <a:prstDash val="solid"/>
+                      <a:round/>
+                      <a:headEnd type="none" w="med" len="med"/>
+                      <a:tailEnd type="none" w="med" len="med"/>
+                    </a:lnB>
+                    <a:solidFill>
+                      <a:srgbClr val="FFFFFF"/>
+                    </a:solidFill>
+                  </a:tcPr>
+                </a:tc>
+              </a:tr>
+            </a:tbl>
+          </a:graphicData>
+        </a:graphic>
+      </p:graphicFrame>
+      <p:sp>
+        <p:nvSpPr>
+          <p:cNvPr id="7" name="Shape 4"/>
+          <p:cNvSpPr/>
+          <p:nvPr/>
+        </p:nvSpPr>
+        <p:spPr>
+          <a:xfrm>
+            <a:off x="685800" y="3721608"/>
+            <a:ext cx="10789920" cy="658368"/>
+          </a:xfrm>
+          <a:prstGeom prst="roundRect">
+            <a:avLst>
+              <a:gd name="adj" fmla="val 8333"/>
+            </a:avLst>
+          </a:prstGeom>
+          <a:solidFill>
+            <a:srgbClr val="D9E6F4"/>
+          </a:solidFill>
+          <a:ln w="19050">
+            <a:solidFill>
+              <a:srgbClr val="0B5CAD"/>
+            </a:solidFill>
+            <a:prstDash val="solid"/>
+          </a:ln>
+        </p:spPr>
+      </p:sp>
+      <p:sp>
+        <p:nvSpPr>
+          <p:cNvPr id="8" name="Text 5"/>
+          <p:cNvSpPr/>
+          <p:nvPr/>
+        </p:nvSpPr>
+        <p:spPr>
+          <a:xfrm>
+            <a:off x="914400" y="3867912"/>
+            <a:ext cx="10332720" cy="365760"/>
+          </a:xfrm>
+          <a:prstGeom prst="rect">
+            <a:avLst/>
+          </a:prstGeom>
+          <a:noFill/>
+          <a:ln/>
+        </p:spPr>
+        <p:txBody>
+          <a:bodyPr wrap="square" lIns="0" tIns="0" rIns="0" bIns="0" rtlCol="0" anchor="ctr"/>
+          <a:lstStyle/>
+          <a:p>
+            <a:pPr indent="0" marL="0">
+              <a:buNone/>
+            </a:pPr>
+            <a:r>
+              <a:rPr lang="en-US" sz="1500" b="1" dirty="0">
+                <a:solidFill>
+                  <a:srgbClr val="0B5CAD"/>
+                </a:solidFill>
+                <a:latin typeface="Yu Gothic" pitchFamily="34" charset="0"/>
+                <a:ea typeface="Yu Gothic" pitchFamily="34" charset="-122"/>
+                <a:cs typeface="Yu Gothic" pitchFamily="34" charset="-120"/>
+              </a:rPr>
+              <a:t>複数の行に当てはまる場合、もっとも細かく指定している行を選ぶ</a:t>
+            </a:r>
+            <a:endParaRPr lang="en-US" sz="1500" dirty="0"/>
+          </a:p>
+        </p:txBody>
+      </p:sp>
+      <p:sp>
+        <p:nvSpPr>
+          <p:cNvPr id="9" name="Text 6"/>
+          <p:cNvSpPr/>
+          <p:nvPr/>
+        </p:nvSpPr>
+        <p:spPr>
+          <a:xfrm>
+            <a:off x="685800" y="4544568"/>
+            <a:ext cx="10789920" cy="457200"/>
+          </a:xfrm>
+          <a:prstGeom prst="rect">
+            <a:avLst/>
+          </a:prstGeom>
+          <a:noFill/>
+          <a:ln/>
+        </p:spPr>
+        <p:txBody>
+          <a:bodyPr wrap="square" lIns="0" tIns="0" rIns="0" bIns="0" rtlCol="0" anchor="ctr"/>
+          <a:lstStyle/>
+          <a:p>
+            <a:pPr indent="0" marL="0">
+              <a:lnSpc>
+                <a:spcPts val="2000"/>
+              </a:lnSpc>
+              <a:buNone/>
+            </a:pPr>
+            <a:r>
+              <a:rPr lang="en-US" sz="1300" dirty="0">
+                <a:solidFill>
+                  <a:srgbClr val="5F6672"/>
+                </a:solidFill>
+                <a:latin typeface="Yu Gothic" pitchFamily="34" charset="0"/>
+                <a:ea typeface="Yu Gothic" pitchFamily="34" charset="-122"/>
+                <a:cs typeface="Yu Gothic" pitchFamily="34" charset="-120"/>
+              </a:rPr>
+              <a:t>デフォルトルートはどのアドレスにも当てはまるがプレフィクスが最短なので、他に該当がないときだけ使われる。</a:t>
+            </a:r>
+            <a:endParaRPr lang="en-US" sz="1300" dirty="0"/>
+          </a:p>
+          <a:p>
+            <a:pPr indent="0" marL="0">
+              <a:lnSpc>
+                <a:spcPts val="2000"/>
+              </a:lnSpc>
+              <a:buNone/>
+            </a:pPr>
+            <a:r>
+              <a:rPr lang="en-US" sz="1300" dirty="0">
+                <a:solidFill>
+                  <a:srgbClr val="5F6672"/>
+                </a:solidFill>
+                <a:latin typeface="Yu Gothic" pitchFamily="34" charset="0"/>
+                <a:ea typeface="Yu Gothic" pitchFamily="34" charset="-122"/>
+                <a:cs typeface="Yu Gothic" pitchFamily="34" charset="-120"/>
+              </a:rPr>
+              <a:t>TTL はルータを通るたびに1減り、0 で破棄される。経路が輪になっていても永遠に回り続けない。</a:t>
+            </a:r>
+            <a:endParaRPr lang="en-US" sz="1300" dirty="0"/>
+          </a:p>
+        </p:txBody>
+      </p:sp>
+    </p:spTree>
+  </p:cSld>
+  <p:clrMapOvr>
+    <a:masterClrMapping/>
+  </p:clrMapOvr>
+</p:sld>
+</file>
+
+<file path=ppt/slides/slide24.xml><?xml version="1.0" encoding="utf-8"?>
+<p:sld xmlns:a="http://schemas.openxmlformats.org/drawingml/2006/main" xmlns:r="http://schemas.openxmlformats.org/officeDocument/2006/relationships" xmlns:p="http://schemas.openxmlformats.org/presentationml/2006/main">
+  <p:cSld name="Slide 24">
+    <p:bg>
+      <p:bgPr>
+        <a:solidFill>
+          <a:srgbClr val="FFFFFF"/>
+        </a:solidFill>
+      </p:bgPr>
+    </p:bg>
+    <p:spTree>
+      <p:nvGrpSpPr>
+        <p:cNvPr id="1" name=""/>
+        <p:cNvGrpSpPr/>
+        <p:nvPr/>
+      </p:nvGrpSpPr>
+      <p:grpSpPr>
+        <a:xfrm>
+          <a:off x="0" y="0"/>
+          <a:ext cx="0" cy="0"/>
+          <a:chOff x="0" y="0"/>
+          <a:chExt cx="0" cy="0"/>
+        </a:xfrm>
+      </p:grpSpPr>
+      <p:sp>
+        <p:nvSpPr>
+          <p:cNvPr id="2" name="Text 0"/>
+          <p:cNvSpPr/>
+          <p:nvPr/>
+        </p:nvSpPr>
+        <p:spPr>
+          <a:xfrm>
+            <a:off x="566928" y="310896"/>
+            <a:ext cx="4572000" cy="256032"/>
+          </a:xfrm>
+          <a:prstGeom prst="rect">
+            <a:avLst/>
+          </a:prstGeom>
+          <a:noFill/>
+          <a:ln/>
+        </p:spPr>
+        <p:txBody>
+          <a:bodyPr wrap="square" lIns="0" tIns="0" rIns="0" bIns="0" rtlCol="0" anchor="ctr"/>
+          <a:lstStyle/>
+          <a:p>
+            <a:pPr indent="0" marL="0">
+              <a:buNone/>
+            </a:pPr>
+            <a:r>
+              <a:rPr lang="en-US" sz="1200" b="1" dirty="0">
+                <a:solidFill>
+                  <a:srgbClr val="0B5CAD"/>
+                </a:solidFill>
+                <a:latin typeface="Yu Gothic" pitchFamily="34" charset="0"/>
+                <a:ea typeface="Yu Gothic" pitchFamily="34" charset="-122"/>
+                <a:cs typeface="Yu Gothic" pitchFamily="34" charset="-120"/>
+              </a:rPr>
+              <a:t>9.5　IP</a:t>
+            </a:r>
+            <a:endParaRPr lang="en-US" sz="1200" dirty="0"/>
+          </a:p>
+        </p:txBody>
+      </p:sp>
+      <p:sp>
+        <p:nvSpPr>
+          <p:cNvPr id="3" name="Text 1"/>
+          <p:cNvSpPr/>
+          <p:nvPr/>
+        </p:nvSpPr>
+        <p:spPr>
+          <a:xfrm>
+            <a:off x="548640" y="603504"/>
+            <a:ext cx="11064240" cy="731520"/>
+          </a:xfrm>
+          <a:prstGeom prst="rect">
+            <a:avLst/>
+          </a:prstGeom>
+          <a:noFill/>
+          <a:ln/>
+        </p:spPr>
+        <p:txBody>
+          <a:bodyPr wrap="square" lIns="0" tIns="0" rIns="0" bIns="0" rtlCol="0" anchor="t"/>
+          <a:lstStyle/>
+          <a:p>
+            <a:pPr indent="0" marL="0">
+              <a:buNone/>
+            </a:pPr>
+            <a:r>
+              <a:rPr lang="en-US" sz="3000" b="1" dirty="0">
+                <a:solidFill>
+                  <a:srgbClr val="16191D"/>
+                </a:solidFill>
+                <a:latin typeface="Yu Gothic" pitchFamily="34" charset="0"/>
+                <a:ea typeface="Yu Gothic" pitchFamily="34" charset="-122"/>
+                <a:cs typeface="Yu Gothic" pitchFamily="34" charset="-120"/>
+              </a:rPr>
+              <a:t>パケットの中継</a:t>
+            </a:r>
+            <a:endParaRPr lang="en-US" sz="3000" dirty="0"/>
+          </a:p>
+        </p:txBody>
+      </p:sp>
+      <p:sp>
+        <p:nvSpPr>
+          <p:cNvPr id="4" name="Text 2"/>
+          <p:cNvSpPr/>
+          <p:nvPr/>
+        </p:nvSpPr>
+        <p:spPr>
+          <a:xfrm>
+            <a:off x="11247120" y="6355080"/>
+            <a:ext cx="548640" cy="274320"/>
+          </a:xfrm>
+          <a:prstGeom prst="rect">
+            <a:avLst/>
+          </a:prstGeom>
+          <a:noFill/>
+          <a:ln/>
+        </p:spPr>
+        <p:txBody>
+          <a:bodyPr wrap="square" lIns="0" tIns="0" rIns="0" bIns="0" rtlCol="0" anchor="ctr"/>
+          <a:lstStyle/>
+          <a:p>
+            <a:pPr algn="r" indent="0" marL="0">
+              <a:buNone/>
+            </a:pPr>
+            <a:r>
+              <a:rPr lang="en-US" sz="1000" dirty="0">
+                <a:solidFill>
+                  <a:srgbClr val="5F6672"/>
+                </a:solidFill>
+                <a:latin typeface="Yu Gothic" pitchFamily="34" charset="0"/>
+                <a:ea typeface="Yu Gothic" pitchFamily="34" charset="-122"/>
+                <a:cs typeface="Yu Gothic" pitchFamily="34" charset="-120"/>
+              </a:rPr>
+              <a:t>24</a:t>
+            </a:r>
+            <a:endParaRPr lang="en-US" sz="1000" dirty="0"/>
+          </a:p>
+        </p:txBody>
+      </p:sp>
+      <p:pic>
+        <p:nvPicPr>
+          <p:cNvPr id="5" name="Image 0" descr="/Users/koide/Documents/Playground/CompOutline/slides/png/fig-09-06.png">    </p:cNvPr>
+          <p:cNvPicPr>
+            <a:picLocks noChangeAspect="1"/>
+          </p:cNvPicPr>
+          <p:nvPr/>
+        </p:nvPicPr>
+        <p:blipFill>
+          <a:blip r:embed="rId1"/>
+          <a:stretch>
+            <a:fillRect/>
+          </a:stretch>
+        </p:blipFill>
+        <p:spPr>
+          <a:xfrm>
+            <a:off x="1737360" y="1371600"/>
+            <a:ext cx="8686800" cy="4114800"/>
+          </a:xfrm>
+          <a:prstGeom prst="rect">
+            <a:avLst/>
+          </a:prstGeom>
+        </p:spPr>
+      </p:pic>
+    </p:spTree>
+  </p:cSld>
+  <p:clrMapOvr>
+    <a:masterClrMapping/>
+  </p:clrMapOvr>
+</p:sld>
+</file>
+
+<file path=ppt/slides/slide25.xml><?xml version="1.0" encoding="utf-8"?>
+<p:sld xmlns:a="http://schemas.openxmlformats.org/drawingml/2006/main" xmlns:r="http://schemas.openxmlformats.org/officeDocument/2006/relationships" xmlns:p="http://schemas.openxmlformats.org/presentationml/2006/main">
+  <p:cSld name="Slide 25">
+    <p:bg>
+      <p:bgPr>
+        <a:solidFill>
+          <a:srgbClr val="FFFFFF"/>
+        </a:solidFill>
+      </p:bgPr>
+    </p:bg>
+    <p:spTree>
+      <p:nvGrpSpPr>
+        <p:cNvPr id="1" name=""/>
+        <p:cNvGrpSpPr/>
+        <p:nvPr/>
+      </p:nvGrpSpPr>
+      <p:grpSpPr>
+        <a:xfrm>
+          <a:off x="0" y="0"/>
+          <a:ext cx="0" cy="0"/>
+          <a:chOff x="0" y="0"/>
+          <a:chExt cx="0" cy="0"/>
+        </a:xfrm>
+      </p:grpSpPr>
+      <p:sp>
+        <p:nvSpPr>
+          <p:cNvPr id="2" name="Text 0"/>
+          <p:cNvSpPr/>
+          <p:nvPr/>
+        </p:nvSpPr>
+        <p:spPr>
+          <a:xfrm>
+            <a:off x="566928" y="310896"/>
+            <a:ext cx="4572000" cy="256032"/>
+          </a:xfrm>
+          <a:prstGeom prst="rect">
+            <a:avLst/>
+          </a:prstGeom>
+          <a:noFill/>
+          <a:ln/>
+        </p:spPr>
+        <p:txBody>
+          <a:bodyPr wrap="square" lIns="0" tIns="0" rIns="0" bIns="0" rtlCol="0" anchor="ctr"/>
+          <a:lstStyle/>
+          <a:p>
+            <a:pPr indent="0" marL="0">
+              <a:buNone/>
+            </a:pPr>
+            <a:r>
+              <a:rPr lang="en-US" sz="1200" b="1" dirty="0">
+                <a:solidFill>
+                  <a:srgbClr val="0B5CAD"/>
+                </a:solidFill>
+                <a:latin typeface="Yu Gothic" pitchFamily="34" charset="0"/>
+                <a:ea typeface="Yu Gothic" pitchFamily="34" charset="-122"/>
+                <a:cs typeface="Yu Gothic" pitchFamily="34" charset="-120"/>
+              </a:rPr>
+              <a:t>9.5　IP</a:t>
+            </a:r>
+            <a:endParaRPr lang="en-US" sz="1200" dirty="0"/>
+          </a:p>
+        </p:txBody>
+      </p:sp>
+      <p:sp>
+        <p:nvSpPr>
+          <p:cNvPr id="3" name="Text 1"/>
+          <p:cNvSpPr/>
+          <p:nvPr/>
+        </p:nvSpPr>
+        <p:spPr>
+          <a:xfrm>
+            <a:off x="548640" y="603504"/>
+            <a:ext cx="11064240" cy="731520"/>
+          </a:xfrm>
+          <a:prstGeom prst="rect">
+            <a:avLst/>
+          </a:prstGeom>
+          <a:noFill/>
+          <a:ln/>
+        </p:spPr>
+        <p:txBody>
+          <a:bodyPr wrap="square" lIns="0" tIns="0" rIns="0" bIns="0" rtlCol="0" anchor="t"/>
+          <a:lstStyle/>
+          <a:p>
+            <a:pPr indent="0" marL="0">
+              <a:buNone/>
+            </a:pPr>
+            <a:r>
+              <a:rPr lang="en-US" sz="3000" b="1" dirty="0">
+                <a:solidFill>
+                  <a:srgbClr val="16191D"/>
+                </a:solidFill>
+                <a:latin typeface="Yu Gothic" pitchFamily="34" charset="0"/>
+                <a:ea typeface="Yu Gothic" pitchFamily="34" charset="-122"/>
+                <a:cs typeface="Yu Gothic" pitchFamily="34" charset="-120"/>
+              </a:rPr>
+              <a:t>アドレスの枯渇と NAT</a:t>
+            </a:r>
+            <a:endParaRPr lang="en-US" sz="3000" dirty="0"/>
+          </a:p>
+        </p:txBody>
+      </p:sp>
+      <p:sp>
+        <p:nvSpPr>
+          <p:cNvPr id="4" name="Text 2"/>
+          <p:cNvSpPr/>
+          <p:nvPr/>
+        </p:nvSpPr>
+        <p:spPr>
+          <a:xfrm>
+            <a:off x="11247120" y="6355080"/>
+            <a:ext cx="548640" cy="274320"/>
+          </a:xfrm>
+          <a:prstGeom prst="rect">
+            <a:avLst/>
+          </a:prstGeom>
+          <a:noFill/>
+          <a:ln/>
+        </p:spPr>
+        <p:txBody>
+          <a:bodyPr wrap="square" lIns="0" tIns="0" rIns="0" bIns="0" rtlCol="0" anchor="ctr"/>
+          <a:lstStyle/>
+          <a:p>
+            <a:pPr algn="r" indent="0" marL="0">
+              <a:buNone/>
+            </a:pPr>
+            <a:r>
+              <a:rPr lang="en-US" sz="1000" dirty="0">
+                <a:solidFill>
+                  <a:srgbClr val="5F6672"/>
+                </a:solidFill>
+                <a:latin typeface="Yu Gothic" pitchFamily="34" charset="0"/>
+                <a:ea typeface="Yu Gothic" pitchFamily="34" charset="-122"/>
+                <a:cs typeface="Yu Gothic" pitchFamily="34" charset="-120"/>
+              </a:rPr>
+              <a:t>25</a:t>
+            </a:r>
+            <a:endParaRPr lang="en-US" sz="1000" dirty="0"/>
+          </a:p>
+        </p:txBody>
+      </p:sp>
+      <p:sp>
+        <p:nvSpPr>
+          <p:cNvPr id="5" name="Text 3"/>
+          <p:cNvSpPr/>
+          <p:nvPr/>
+        </p:nvSpPr>
+        <p:spPr>
+          <a:xfrm>
+            <a:off x="685800" y="1481328"/>
+            <a:ext cx="10789920" cy="365760"/>
+          </a:xfrm>
+          <a:prstGeom prst="rect">
+            <a:avLst/>
+          </a:prstGeom>
+          <a:noFill/>
+          <a:ln/>
+        </p:spPr>
+        <p:txBody>
+          <a:bodyPr wrap="square" lIns="0" tIns="0" rIns="0" bIns="0" rtlCol="0" anchor="ctr"/>
+          <a:lstStyle/>
+          <a:p>
+            <a:pPr indent="0" marL="0">
+              <a:lnSpc>
+                <a:spcPts val="2200"/>
+              </a:lnSpc>
+              <a:buNone/>
+            </a:pPr>
+            <a:r>
+              <a:rPr lang="en-US" sz="1500" dirty="0">
+                <a:solidFill>
+                  <a:srgbClr val="16191D"/>
+                </a:solidFill>
+                <a:latin typeface="Yu Gothic" pitchFamily="34" charset="0"/>
+                <a:ea typeface="Yu Gothic" pitchFamily="34" charset="-122"/>
+                <a:cs typeface="Yu Gothic" pitchFamily="34" charset="-120"/>
+              </a:rPr>
+              <a:t>43億個は世界人口を下回る。IPv4 アドレスの新規割り当ては2011年以降、順次枯渇している。</a:t>
+            </a:r>
+            <a:endParaRPr lang="en-US" sz="1500" dirty="0"/>
+          </a:p>
+        </p:txBody>
+      </p:sp>
+      <p:pic>
+        <p:nvPicPr>
+          <p:cNvPr id="6" name="Image 0" descr="/Users/koide/Documents/Playground/CompOutline/slides/png/fig-09-07.png">    </p:cNvPr>
+          <p:cNvPicPr>
+            <a:picLocks noChangeAspect="1"/>
+          </p:cNvPicPr>
+          <p:nvPr/>
+        </p:nvPicPr>
+        <p:blipFill>
+          <a:blip r:embed="rId1"/>
+          <a:stretch>
+            <a:fillRect/>
+          </a:stretch>
+        </p:blipFill>
+        <p:spPr>
+          <a:xfrm>
+            <a:off x="2578100" y="1883664"/>
+            <a:ext cx="7005320" cy="3602736"/>
+          </a:xfrm>
+          <a:prstGeom prst="rect">
+            <a:avLst/>
+          </a:prstGeom>
+        </p:spPr>
+      </p:pic>
+      <p:sp>
+        <p:nvSpPr>
+          <p:cNvPr id="7" name="Text 4"/>
+          <p:cNvSpPr/>
+          <p:nvPr/>
+        </p:nvSpPr>
+        <p:spPr>
+          <a:xfrm>
+            <a:off x="685800" y="5687568"/>
+            <a:ext cx="10789920" cy="365760"/>
+          </a:xfrm>
+          <a:prstGeom prst="rect">
+            <a:avLst/>
+          </a:prstGeom>
+          <a:noFill/>
+          <a:ln/>
+        </p:spPr>
+        <p:txBody>
+          <a:bodyPr wrap="square" lIns="0" tIns="0" rIns="0" bIns="0" rtlCol="0" anchor="ctr"/>
+          <a:lstStyle/>
+          <a:p>
+            <a:pPr algn="ctr" indent="0" marL="0">
+              <a:buNone/>
+            </a:pPr>
+            <a:r>
+              <a:rPr lang="en-US" sz="1500" dirty="0">
+                <a:solidFill>
+                  <a:srgbClr val="16191D"/>
+                </a:solidFill>
+                <a:latin typeface="Yu Gothic" pitchFamily="34" charset="0"/>
+                <a:ea typeface="Yu Gothic" pitchFamily="34" charset="-122"/>
+                <a:cs typeface="Yu Gothic" pitchFamily="34" charset="-120"/>
+              </a:rPr>
+              <a:t>ポート番号も併せて変換することで、1個のグローバルアドレスを多数の機器で共有できる。</a:t>
+            </a:r>
+            <a:endParaRPr lang="en-US" sz="1500" dirty="0"/>
+          </a:p>
+        </p:txBody>
+      </p:sp>
+      <p:sp>
+        <p:nvSpPr>
+          <p:cNvPr id="8" name="Text 5"/>
+          <p:cNvSpPr/>
+          <p:nvPr/>
+        </p:nvSpPr>
+        <p:spPr>
+          <a:xfrm>
+            <a:off x="685800" y="6071616"/>
+            <a:ext cx="10789920" cy="640080"/>
+          </a:xfrm>
+          <a:prstGeom prst="rect">
+            <a:avLst/>
+          </a:prstGeom>
+          <a:noFill/>
+          <a:ln/>
+        </p:spPr>
+        <p:txBody>
+          <a:bodyPr wrap="square" lIns="0" tIns="0" rIns="0" bIns="0" rtlCol="0" anchor="ctr"/>
+          <a:lstStyle/>
+          <a:p>
+            <a:pPr algn="ctr" indent="0" marL="0">
+              <a:lnSpc>
+                <a:spcPts val="2000"/>
+              </a:lnSpc>
+              <a:buNone/>
+            </a:pPr>
+            <a:r>
+              <a:rPr lang="en-US" sz="1300" dirty="0">
+                <a:solidFill>
+                  <a:srgbClr val="5F6672"/>
+                </a:solidFill>
+                <a:latin typeface="Yu Gothic" pitchFamily="34" charset="0"/>
+                <a:ea typeface="Yu Gothic" pitchFamily="34" charset="-122"/>
+                <a:cs typeface="Yu Gothic" pitchFamily="34" charset="-120"/>
+              </a:rPr>
+              <a:t>根本的な解決は IPv6（128ビット、約 3.4×10³⁸ 個）。地球の全表面 1cm² あたりに 10²² 個以上を</a:t>
+            </a:r>
+            <a:endParaRPr lang="en-US" sz="1300" dirty="0"/>
+          </a:p>
+          <a:p>
+            <a:pPr algn="ctr" indent="0" marL="0">
+              <a:lnSpc>
+                <a:spcPts val="2000"/>
+              </a:lnSpc>
+              <a:buNone/>
+            </a:pPr>
+            <a:r>
+              <a:rPr lang="en-US" sz="1300" dirty="0">
+                <a:solidFill>
+                  <a:srgbClr val="5F6672"/>
+                </a:solidFill>
+                <a:latin typeface="Yu Gothic" pitchFamily="34" charset="0"/>
+                <a:ea typeface="Yu Gothic" pitchFamily="34" charset="-122"/>
+                <a:cs typeface="Yu Gothic" pitchFamily="34" charset="-120"/>
+              </a:rPr>
+              <a:t>割り当ててもまだ余る。IPv4 と IPv6 は直接相互運用できないため、当面はデュアルスタック運用が続く。</a:t>
+            </a:r>
+            <a:endParaRPr lang="en-US" sz="1300" dirty="0"/>
+          </a:p>
+        </p:txBody>
+      </p:sp>
+    </p:spTree>
+  </p:cSld>
+  <p:clrMapOvr>
+    <a:masterClrMapping/>
+  </p:clrMapOvr>
+</p:sld>
+</file>
+
+<file path=ppt/slides/slide26.xml><?xml version="1.0" encoding="utf-8"?>
+<p:sld xmlns:a="http://schemas.openxmlformats.org/drawingml/2006/main" xmlns:r="http://schemas.openxmlformats.org/officeDocument/2006/relationships" xmlns:p="http://schemas.openxmlformats.org/presentationml/2006/main">
+  <p:cSld name="Slide 26">
+    <p:bg>
+      <p:bgPr>
+        <a:solidFill>
+          <a:srgbClr val="FFFFFF"/>
+        </a:solidFill>
+      </p:bgPr>
+    </p:bg>
+    <p:spTree>
+      <p:nvGrpSpPr>
+        <p:cNvPr id="1" name=""/>
+        <p:cNvGrpSpPr/>
+        <p:nvPr/>
+      </p:nvGrpSpPr>
+      <p:grpSpPr>
+        <a:xfrm>
+          <a:off x="0" y="0"/>
+          <a:ext cx="0" cy="0"/>
+          <a:chOff x="0" y="0"/>
+          <a:chExt cx="0" cy="0"/>
+        </a:xfrm>
+      </p:grpSpPr>
+      <p:sp>
+        <p:nvSpPr>
+          <p:cNvPr id="2" name="Text 0"/>
+          <p:cNvSpPr/>
+          <p:nvPr/>
+        </p:nvSpPr>
+        <p:spPr>
+          <a:xfrm>
+            <a:off x="566928" y="310896"/>
+            <a:ext cx="4572000" cy="256032"/>
+          </a:xfrm>
+          <a:prstGeom prst="rect">
+            <a:avLst/>
+          </a:prstGeom>
+          <a:noFill/>
+          <a:ln/>
+        </p:spPr>
+        <p:txBody>
+          <a:bodyPr wrap="square" lIns="0" tIns="0" rIns="0" bIns="0" rtlCol="0" anchor="ctr"/>
+          <a:lstStyle/>
+          <a:p>
+            <a:pPr indent="0" marL="0">
+              <a:buNone/>
+            </a:pPr>
+            <a:r>
+              <a:rPr lang="en-US" sz="1200" b="1" dirty="0">
+                <a:solidFill>
+                  <a:srgbClr val="0B5CAD"/>
+                </a:solidFill>
+                <a:latin typeface="Yu Gothic" pitchFamily="34" charset="0"/>
+                <a:ea typeface="Yu Gothic" pitchFamily="34" charset="-122"/>
+                <a:cs typeface="Yu Gothic" pitchFamily="34" charset="-120"/>
+              </a:rPr>
               <a:t>第9回</a:t>
             </a:r>
             <a:endParaRPr lang="en-US" sz="1200" dirty="0"/>
@@ -12253,7 +15821,7 @@
                 <a:ea typeface="Yu Gothic" pitchFamily="34" charset="-122"/>
                 <a:cs typeface="Yu Gothic" pitchFamily="34" charset="-120"/>
               </a:rPr>
-              <a:t>21</a:t>
+              <a:t>26</a:t>
             </a:r>
             <a:endParaRPr lang="en-US" sz="1000" dirty="0"/>
           </a:p>
@@ -12334,7 +15902,7 @@
         <p:spPr>
           <a:xfrm>
             <a:off x="1783080" y="1673352"/>
-            <a:ext cx="9692640" cy="932688"/>
+            <a:ext cx="9692640" cy="722376"/>
           </a:xfrm>
           <a:prstGeom prst="rect">
             <a:avLst/>
@@ -12375,7 +15943,7 @@
         </p:nvSpPr>
         <p:spPr>
           <a:xfrm>
-            <a:off x="685800" y="2770632"/>
+            <a:off x="685800" y="2560320"/>
             <a:ext cx="868680" cy="402336"/>
           </a:xfrm>
           <a:prstGeom prst="roundRect">
@@ -12402,7 +15970,7 @@
         </p:nvSpPr>
         <p:spPr>
           <a:xfrm>
-            <a:off x="685800" y="2770632"/>
+            <a:off x="685800" y="2560320"/>
             <a:ext cx="868680" cy="402336"/>
           </a:xfrm>
           <a:prstGeom prst="rect">
@@ -12441,8 +16009,8 @@
         </p:nvSpPr>
         <p:spPr>
           <a:xfrm>
-            <a:off x="1783080" y="2752344"/>
-            <a:ext cx="9692640" cy="932688"/>
+            <a:off x="1783080" y="2542032"/>
+            <a:ext cx="9692640" cy="722376"/>
           </a:xfrm>
           <a:prstGeom prst="rect">
             <a:avLst/>
@@ -12483,7 +16051,7 @@
         </p:nvSpPr>
         <p:spPr>
           <a:xfrm>
-            <a:off x="685800" y="3849624"/>
+            <a:off x="685800" y="3429000"/>
             <a:ext cx="868680" cy="402336"/>
           </a:xfrm>
           <a:prstGeom prst="roundRect">
@@ -12510,7 +16078,7 @@
         </p:nvSpPr>
         <p:spPr>
           <a:xfrm>
-            <a:off x="685800" y="3849624"/>
+            <a:off x="685800" y="3429000"/>
             <a:ext cx="868680" cy="402336"/>
           </a:xfrm>
           <a:prstGeom prst="rect">
@@ -12549,8 +16117,8 @@
         </p:nvSpPr>
         <p:spPr>
           <a:xfrm>
-            <a:off x="1783080" y="3831336"/>
-            <a:ext cx="9692640" cy="932688"/>
+            <a:off x="1783080" y="3410712"/>
+            <a:ext cx="9692640" cy="722376"/>
           </a:xfrm>
           <a:prstGeom prst="rect">
             <a:avLst/>
@@ -12591,7 +16159,7 @@
         </p:nvSpPr>
         <p:spPr>
           <a:xfrm>
-            <a:off x="685800" y="4928616"/>
+            <a:off x="685800" y="4297680"/>
             <a:ext cx="868680" cy="402336"/>
           </a:xfrm>
           <a:prstGeom prst="roundRect">
@@ -12618,7 +16186,7 @@
         </p:nvSpPr>
         <p:spPr>
           <a:xfrm>
-            <a:off x="685800" y="4928616"/>
+            <a:off x="685800" y="4297680"/>
             <a:ext cx="868680" cy="402336"/>
           </a:xfrm>
           <a:prstGeom prst="rect">
@@ -12657,8 +16225,8 @@
         </p:nvSpPr>
         <p:spPr>
           <a:xfrm>
-            <a:off x="1783080" y="4910328"/>
-            <a:ext cx="9692640" cy="932688"/>
+            <a:off x="1783080" y="4279392"/>
+            <a:ext cx="9692640" cy="722376"/>
           </a:xfrm>
           <a:prstGeom prst="rect">
             <a:avLst/>
@@ -12691,6 +16259,222 @@
           </a:p>
         </p:txBody>
       </p:sp>
+      <p:sp>
+        <p:nvSpPr>
+          <p:cNvPr id="17" name="Shape 15"/>
+          <p:cNvSpPr/>
+          <p:nvPr/>
+        </p:nvSpPr>
+        <p:spPr>
+          <a:xfrm>
+            <a:off x="685800" y="5166360"/>
+            <a:ext cx="868680" cy="402336"/>
+          </a:xfrm>
+          <a:prstGeom prst="roundRect">
+            <a:avLst>
+              <a:gd name="adj" fmla="val 18182"/>
+            </a:avLst>
+          </a:prstGeom>
+          <a:solidFill>
+            <a:srgbClr val="D9E6F4"/>
+          </a:solidFill>
+          <a:ln w="12700">
+            <a:solidFill>
+              <a:srgbClr val="0B5CAD"/>
+            </a:solidFill>
+            <a:prstDash val="solid"/>
+          </a:ln>
+        </p:spPr>
+      </p:sp>
+      <p:sp>
+        <p:nvSpPr>
+          <p:cNvPr id="18" name="Text 16"/>
+          <p:cNvSpPr/>
+          <p:nvPr/>
+        </p:nvSpPr>
+        <p:spPr>
+          <a:xfrm>
+            <a:off x="685800" y="5166360"/>
+            <a:ext cx="868680" cy="402336"/>
+          </a:xfrm>
+          <a:prstGeom prst="rect">
+            <a:avLst/>
+          </a:prstGeom>
+          <a:noFill/>
+          <a:ln/>
+        </p:spPr>
+        <p:txBody>
+          <a:bodyPr wrap="square" lIns="0" tIns="0" rIns="0" bIns="0" rtlCol="0" anchor="ctr"/>
+          <a:lstStyle/>
+          <a:p>
+            <a:pPr algn="ctr" indent="0" marL="0">
+              <a:buNone/>
+            </a:pPr>
+            <a:r>
+              <a:rPr lang="en-US" sz="1300" b="1" dirty="0">
+                <a:solidFill>
+                  <a:srgbClr val="0B5CAD"/>
+                </a:solidFill>
+                <a:latin typeface="Courier New" pitchFamily="34" charset="0"/>
+                <a:ea typeface="Courier New" pitchFamily="34" charset="-122"/>
+                <a:cs typeface="Courier New" pitchFamily="34" charset="-120"/>
+              </a:rPr>
+              <a:t>9-5</a:t>
+            </a:r>
+            <a:endParaRPr lang="en-US" sz="1300" dirty="0"/>
+          </a:p>
+        </p:txBody>
+      </p:sp>
+      <p:sp>
+        <p:nvSpPr>
+          <p:cNvPr id="19" name="Text 17"/>
+          <p:cNvSpPr/>
+          <p:nvPr/>
+        </p:nvSpPr>
+        <p:spPr>
+          <a:xfrm>
+            <a:off x="1783080" y="5148072"/>
+            <a:ext cx="9692640" cy="722376"/>
+          </a:xfrm>
+          <a:prstGeom prst="rect">
+            <a:avLst/>
+          </a:prstGeom>
+          <a:noFill/>
+          <a:ln/>
+        </p:spPr>
+        <p:txBody>
+          <a:bodyPr wrap="square" lIns="0" tIns="0" rIns="0" bIns="0" rtlCol="0" anchor="t"/>
+          <a:lstStyle/>
+          <a:p>
+            <a:pPr indent="0" marL="0">
+              <a:lnSpc>
+                <a:spcPts val="2100"/>
+              </a:lnSpc>
+              <a:buNone/>
+            </a:pPr>
+            <a:r>
+              <a:rPr lang="en-US" sz="1400" dirty="0">
+                <a:solidFill>
+                  <a:srgbClr val="16191D"/>
+                </a:solidFill>
+                <a:latin typeface="Yu Gothic" pitchFamily="34" charset="0"/>
+                <a:ea typeface="Yu Gothic" pitchFamily="34" charset="-122"/>
+                <a:cs typeface="Yu Gothic" pitchFamily="34" charset="-120"/>
+              </a:rPr>
+              <a:t>198.51.100.130/26 について (a) ネットワークアドレス (b) ブロードキャストアドレス (c) 機器に割り当てられる個数 を求めよ。</a:t>
+            </a:r>
+            <a:endParaRPr lang="en-US" sz="1400" dirty="0"/>
+          </a:p>
+        </p:txBody>
+      </p:sp>
+      <p:sp>
+        <p:nvSpPr>
+          <p:cNvPr id="20" name="Shape 18"/>
+          <p:cNvSpPr/>
+          <p:nvPr/>
+        </p:nvSpPr>
+        <p:spPr>
+          <a:xfrm>
+            <a:off x="685800" y="6035040"/>
+            <a:ext cx="868680" cy="402336"/>
+          </a:xfrm>
+          <a:prstGeom prst="roundRect">
+            <a:avLst>
+              <a:gd name="adj" fmla="val 18182"/>
+            </a:avLst>
+          </a:prstGeom>
+          <a:solidFill>
+            <a:srgbClr val="D9E6F4"/>
+          </a:solidFill>
+          <a:ln w="12700">
+            <a:solidFill>
+              <a:srgbClr val="0B5CAD"/>
+            </a:solidFill>
+            <a:prstDash val="solid"/>
+          </a:ln>
+        </p:spPr>
+      </p:sp>
+      <p:sp>
+        <p:nvSpPr>
+          <p:cNvPr id="21" name="Text 19"/>
+          <p:cNvSpPr/>
+          <p:nvPr/>
+        </p:nvSpPr>
+        <p:spPr>
+          <a:xfrm>
+            <a:off x="685800" y="6035040"/>
+            <a:ext cx="868680" cy="402336"/>
+          </a:xfrm>
+          <a:prstGeom prst="rect">
+            <a:avLst/>
+          </a:prstGeom>
+          <a:noFill/>
+          <a:ln/>
+        </p:spPr>
+        <p:txBody>
+          <a:bodyPr wrap="square" lIns="0" tIns="0" rIns="0" bIns="0" rtlCol="0" anchor="ctr"/>
+          <a:lstStyle/>
+          <a:p>
+            <a:pPr algn="ctr" indent="0" marL="0">
+              <a:buNone/>
+            </a:pPr>
+            <a:r>
+              <a:rPr lang="en-US" sz="1300" b="1" dirty="0">
+                <a:solidFill>
+                  <a:srgbClr val="0B5CAD"/>
+                </a:solidFill>
+                <a:latin typeface="Courier New" pitchFamily="34" charset="0"/>
+                <a:ea typeface="Courier New" pitchFamily="34" charset="-122"/>
+                <a:cs typeface="Courier New" pitchFamily="34" charset="-120"/>
+              </a:rPr>
+              <a:t>9-6</a:t>
+            </a:r>
+            <a:endParaRPr lang="en-US" sz="1300" dirty="0"/>
+          </a:p>
+        </p:txBody>
+      </p:sp>
+      <p:sp>
+        <p:nvSpPr>
+          <p:cNvPr id="22" name="Text 20"/>
+          <p:cNvSpPr/>
+          <p:nvPr/>
+        </p:nvSpPr>
+        <p:spPr>
+          <a:xfrm>
+            <a:off x="1783080" y="6016752"/>
+            <a:ext cx="9692640" cy="722376"/>
+          </a:xfrm>
+          <a:prstGeom prst="rect">
+            <a:avLst/>
+          </a:prstGeom>
+          <a:noFill/>
+          <a:ln/>
+        </p:spPr>
+        <p:txBody>
+          <a:bodyPr wrap="square" lIns="0" tIns="0" rIns="0" bIns="0" rtlCol="0" anchor="t"/>
+          <a:lstStyle/>
+          <a:p>
+            <a:pPr indent="0" marL="0">
+              <a:lnSpc>
+                <a:spcPts val="2100"/>
+              </a:lnSpc>
+              <a:buNone/>
+            </a:pPr>
+            <a:r>
+              <a:rPr lang="en-US" sz="1400" dirty="0">
+                <a:solidFill>
+                  <a:srgbClr val="16191D"/>
+                </a:solidFill>
+                <a:latin typeface="Yu Gothic" pitchFamily="34" charset="0"/>
+                <a:ea typeface="Yu Gothic" pitchFamily="34" charset="-122"/>
+                <a:cs typeface="Yu Gothic" pitchFamily="34" charset="-120"/>
+              </a:rPr>
+              <a:t>パケットがルータを通過するとき、IP ヘッダのアドレスは変化しないが Ethernet ヘッダの MAC アドレスは書き換えられる。この違いが何を意味するか説明せよ。</a:t>
+            </a:r>
+            <a:endParaRPr lang="en-US" sz="1400" dirty="0"/>
+          </a:p>
+        </p:txBody>
+      </p:sp>
     </p:spTree>
   </p:cSld>
   <p:clrMapOvr>
@@ -12699,9 +16483,9 @@
 </p:sld>
 </file>
 
-<file path=ppt/slides/slide22.xml><?xml version="1.0" encoding="utf-8"?>
+<file path=ppt/slides/slide27.xml><?xml version="1.0" encoding="utf-8"?>
 <p:sld xmlns:a="http://schemas.openxmlformats.org/drawingml/2006/main" xmlns:r="http://schemas.openxmlformats.org/officeDocument/2006/relationships" xmlns:p="http://schemas.openxmlformats.org/presentationml/2006/main">
-  <p:cSld name="Slide 22">
+  <p:cSld name="Slide 27">
     <p:bg>
       <p:bgPr>
         <a:solidFill>
@@ -12810,7 +16594,7 @@
         <p:spPr>
           <a:xfrm>
             <a:off x="4297680" y="1380744"/>
-            <a:ext cx="7132320" cy="640080"/>
+            <a:ext cx="7132320" cy="548640"/>
           </a:xfrm>
           <a:prstGeom prst="rect">
             <a:avLst/>
@@ -12851,7 +16635,7 @@
         </p:nvSpPr>
         <p:spPr>
           <a:xfrm>
-            <a:off x="822960" y="2167128"/>
+            <a:off x="822960" y="2075688"/>
             <a:ext cx="3291840" cy="320040"/>
           </a:xfrm>
           <a:prstGeom prst="rect">
@@ -12890,8 +16674,8 @@
         </p:nvSpPr>
         <p:spPr>
           <a:xfrm>
-            <a:off x="4297680" y="2130552"/>
-            <a:ext cx="7132320" cy="640080"/>
+            <a:off x="4297680" y="2039112"/>
+            <a:ext cx="7132320" cy="548640"/>
           </a:xfrm>
           <a:prstGeom prst="rect">
             <a:avLst/>
@@ -12932,7 +16716,7 @@
         </p:nvSpPr>
         <p:spPr>
           <a:xfrm>
-            <a:off x="822960" y="2916936"/>
+            <a:off x="822960" y="2734056"/>
             <a:ext cx="3291840" cy="320040"/>
           </a:xfrm>
           <a:prstGeom prst="rect">
@@ -12971,8 +16755,8 @@
         </p:nvSpPr>
         <p:spPr>
           <a:xfrm>
-            <a:off x="4297680" y="2880360"/>
-            <a:ext cx="7132320" cy="640080"/>
+            <a:off x="4297680" y="2697480"/>
+            <a:ext cx="7132320" cy="548640"/>
           </a:xfrm>
           <a:prstGeom prst="rect">
             <a:avLst/>
@@ -13013,7 +16797,7 @@
         </p:nvSpPr>
         <p:spPr>
           <a:xfrm>
-            <a:off x="822960" y="3666744"/>
+            <a:off x="822960" y="3392424"/>
             <a:ext cx="3291840" cy="320040"/>
           </a:xfrm>
           <a:prstGeom prst="rect">
@@ -13052,8 +16836,8 @@
         </p:nvSpPr>
         <p:spPr>
           <a:xfrm>
-            <a:off x="4297680" y="3630168"/>
-            <a:ext cx="7132320" cy="640080"/>
+            <a:off x="4297680" y="3355848"/>
+            <a:ext cx="7132320" cy="548640"/>
           </a:xfrm>
           <a:prstGeom prst="rect">
             <a:avLst/>
@@ -13094,7 +16878,7 @@
         </p:nvSpPr>
         <p:spPr>
           <a:xfrm>
-            <a:off x="822960" y="4416552"/>
+            <a:off x="822960" y="4050792"/>
             <a:ext cx="3291840" cy="320040"/>
           </a:xfrm>
           <a:prstGeom prst="rect">
@@ -13133,8 +16917,8 @@
         </p:nvSpPr>
         <p:spPr>
           <a:xfrm>
-            <a:off x="4297680" y="4379976"/>
-            <a:ext cx="7132320" cy="640080"/>
+            <a:off x="4297680" y="4014216"/>
+            <a:ext cx="7132320" cy="548640"/>
           </a:xfrm>
           <a:prstGeom prst="rect">
             <a:avLst/>
@@ -13175,7 +16959,7 @@
         </p:nvSpPr>
         <p:spPr>
           <a:xfrm>
-            <a:off x="822960" y="5166360"/>
+            <a:off x="822960" y="4709160"/>
             <a:ext cx="3291840" cy="320040"/>
           </a:xfrm>
           <a:prstGeom prst="rect">
@@ -13214,8 +16998,8 @@
         </p:nvSpPr>
         <p:spPr>
           <a:xfrm>
-            <a:off x="4297680" y="5129784"/>
-            <a:ext cx="7132320" cy="640080"/>
+            <a:off x="4297680" y="4672584"/>
+            <a:ext cx="7132320" cy="548640"/>
           </a:xfrm>
           <a:prstGeom prst="rect">
             <a:avLst/>
@@ -13256,6 +17040,87 @@
         </p:nvSpPr>
         <p:spPr>
           <a:xfrm>
+            <a:off x="822960" y="5367528"/>
+            <a:ext cx="3291840" cy="320040"/>
+          </a:xfrm>
+          <a:prstGeom prst="rect">
+            <a:avLst/>
+          </a:prstGeom>
+          <a:noFill/>
+          <a:ln/>
+        </p:spPr>
+        <p:txBody>
+          <a:bodyPr wrap="square" lIns="0" tIns="0" rIns="0" bIns="0" rtlCol="0" anchor="ctr"/>
+          <a:lstStyle/>
+          <a:p>
+            <a:pPr indent="0" marL="0">
+              <a:buNone/>
+            </a:pPr>
+            <a:r>
+              <a:rPr lang="en-US" sz="1400" b="1" dirty="0">
+                <a:solidFill>
+                  <a:srgbClr val="6AB0F3"/>
+                </a:solidFill>
+                <a:latin typeface="Yu Gothic" pitchFamily="34" charset="0"/>
+                <a:ea typeface="Yu Gothic" pitchFamily="34" charset="-122"/>
+                <a:cs typeface="Yu Gothic" pitchFamily="34" charset="-120"/>
+              </a:rPr>
+              <a:t>IP</a:t>
+            </a:r>
+            <a:endParaRPr lang="en-US" sz="1400" dirty="0"/>
+          </a:p>
+        </p:txBody>
+      </p:sp>
+      <p:sp>
+        <p:nvSpPr>
+          <p:cNvPr id="16" name="Text 14"/>
+          <p:cNvSpPr/>
+          <p:nvPr/>
+        </p:nvSpPr>
+        <p:spPr>
+          <a:xfrm>
+            <a:off x="4297680" y="5330952"/>
+            <a:ext cx="7132320" cy="548640"/>
+          </a:xfrm>
+          <a:prstGeom prst="rect">
+            <a:avLst/>
+          </a:prstGeom>
+          <a:noFill/>
+          <a:ln/>
+        </p:spPr>
+        <p:txBody>
+          <a:bodyPr wrap="square" lIns="0" tIns="0" rIns="0" bIns="0" rtlCol="0" anchor="t"/>
+          <a:lstStyle/>
+          <a:p>
+            <a:pPr indent="0" marL="0">
+              <a:lnSpc>
+                <a:spcPts val="1900"/>
+              </a:lnSpc>
+              <a:buNone/>
+            </a:pPr>
+            <a:r>
+              <a:rPr lang="en-US" sz="1250" dirty="0">
+                <a:solidFill>
+                  <a:srgbClr val="E8EBEF"/>
+                </a:solidFill>
+                <a:latin typeface="Yu Gothic" pitchFamily="34" charset="0"/>
+                <a:ea typeface="Yu Gothic" pitchFamily="34" charset="-122"/>
+                <a:cs typeface="Yu Gothic" pitchFamily="34" charset="-120"/>
+              </a:rPr>
+              <a:t>アドレスは階層構造を持つので経路表を小さく保てる。ルータは最長一致で選ぶ</a:t>
+            </a:r>
+            <a:endParaRPr lang="en-US" sz="1250" dirty="0"/>
+          </a:p>
+        </p:txBody>
+      </p:sp>
+      <p:sp>
+        <p:nvSpPr>
+          <p:cNvPr id="17" name="Text 15"/>
+          <p:cNvSpPr/>
+          <p:nvPr/>
+        </p:nvSpPr>
+        <p:spPr>
+          <a:xfrm>
             <a:off x="822960" y="5989320"/>
             <a:ext cx="10607040" cy="365760"/>
           </a:xfrm>
@@ -13281,7 +17146,7 @@
                 <a:ea typeface="Yu Gothic" pitchFamily="34" charset="-122"/>
                 <a:cs typeface="Yu Gothic" pitchFamily="34" charset="-120"/>
               </a:rPr>
-              <a:t>次回　隣までは届くようになった。では、地球の裏側の、アドレスしか知らない相手にどうやって届けるのか。</a:t>
+              <a:t>次回　届ける道はついた。では、その道の上で、名前しか知らない相手とどうやって確実に、そして安全にやりとりするのか。</a:t>
             </a:r>
             <a:endParaRPr lang="en-US" sz="1300" dirty="0"/>
           </a:p>
@@ -13525,7 +17390,7 @@
               <a:buNone/>
             </a:pPr>
             <a:r>
-              <a:rPr lang="en-US" sz="1600" b="1" dirty="0">
+              <a:rPr lang="en-US" sz="1500" b="1" dirty="0">
                 <a:solidFill>
                   <a:srgbClr val="16191D"/>
                 </a:solidFill>
@@ -13539,7 +17404,7 @@
               <a:buNone/>
             </a:pPr>
             <a:r>
-              <a:rPr lang="en-US" sz="1400" dirty="0">
+              <a:rPr lang="en-US" sz="1300" dirty="0">
                 <a:solidFill>
                   <a:srgbClr val="5F6672"/>
                 </a:solidFill>
@@ -13549,7 +17414,7 @@
               </a:rPr>
               <a:t>　の違いと、それぞれの利点を説明できる</a:t>
             </a:r>
-            <a:endParaRPr lang="en-US" sz="1600" dirty="0"/>
+            <a:endParaRPr lang="en-US" sz="1500" dirty="0"/>
           </a:p>
         </p:txBody>
       </p:sp>
@@ -13561,7 +17426,7 @@
         </p:nvSpPr>
         <p:spPr>
           <a:xfrm>
-            <a:off x="777240" y="2624328"/>
+            <a:off x="777240" y="2496312"/>
             <a:ext cx="457200" cy="457200"/>
           </a:xfrm>
           <a:prstGeom prst="ellipse">
@@ -13586,7 +17451,7 @@
         </p:nvSpPr>
         <p:spPr>
           <a:xfrm>
-            <a:off x="777240" y="2624328"/>
+            <a:off x="777240" y="2496312"/>
             <a:ext cx="457200" cy="457200"/>
           </a:xfrm>
           <a:prstGeom prst="rect">
@@ -13625,7 +17490,7 @@
         </p:nvSpPr>
         <p:spPr>
           <a:xfrm>
-            <a:off x="1417320" y="2642616"/>
+            <a:off x="1417320" y="2514600"/>
             <a:ext cx="9966960" cy="457200"/>
           </a:xfrm>
           <a:prstGeom prst="rect">
@@ -13642,7 +17507,7 @@
               <a:buNone/>
             </a:pPr>
             <a:r>
-              <a:rPr lang="en-US" sz="1600" b="1" dirty="0">
+              <a:rPr lang="en-US" sz="1500" b="1" dirty="0">
                 <a:solidFill>
                   <a:srgbClr val="16191D"/>
                 </a:solidFill>
@@ -13656,7 +17521,7 @@
               <a:buNone/>
             </a:pPr>
             <a:r>
-              <a:rPr lang="en-US" sz="1400" dirty="0">
+              <a:rPr lang="en-US" sz="1300" dirty="0">
                 <a:solidFill>
                   <a:srgbClr val="5F6672"/>
                 </a:solidFill>
@@ -13666,7 +17531,7 @@
               </a:rPr>
               <a:t>　の意義と、カプセル化の仕組みを説明できる</a:t>
             </a:r>
-            <a:endParaRPr lang="en-US" sz="1600" dirty="0"/>
+            <a:endParaRPr lang="en-US" sz="1500" dirty="0"/>
           </a:p>
         </p:txBody>
       </p:sp>
@@ -13678,7 +17543,7 @@
         </p:nvSpPr>
         <p:spPr>
           <a:xfrm>
-            <a:off x="777240" y="3483864"/>
+            <a:off x="777240" y="3227832"/>
             <a:ext cx="457200" cy="457200"/>
           </a:xfrm>
           <a:prstGeom prst="ellipse">
@@ -13703,7 +17568,7 @@
         </p:nvSpPr>
         <p:spPr>
           <a:xfrm>
-            <a:off x="777240" y="3483864"/>
+            <a:off x="777240" y="3227832"/>
             <a:ext cx="457200" cy="457200"/>
           </a:xfrm>
           <a:prstGeom prst="rect">
@@ -13742,7 +17607,7 @@
         </p:nvSpPr>
         <p:spPr>
           <a:xfrm>
-            <a:off x="1417320" y="3502152"/>
+            <a:off x="1417320" y="3246120"/>
             <a:ext cx="9966960" cy="457200"/>
           </a:xfrm>
           <a:prstGeom prst="rect">
@@ -13759,7 +17624,7 @@
               <a:buNone/>
             </a:pPr>
             <a:r>
-              <a:rPr lang="en-US" sz="1600" b="1" dirty="0">
+              <a:rPr lang="en-US" sz="1500" b="1" dirty="0">
                 <a:solidFill>
                   <a:srgbClr val="16191D"/>
                 </a:solidFill>
@@ -13773,7 +17638,7 @@
               <a:buNone/>
             </a:pPr>
             <a:r>
-              <a:rPr lang="en-US" sz="1400" dirty="0">
+              <a:rPr lang="en-US" sz="1300" dirty="0">
                 <a:solidFill>
                   <a:srgbClr val="5F6672"/>
                 </a:solidFill>
@@ -13783,7 +17648,7 @@
               </a:rPr>
               <a:t>　を、AS と IX の観点から説明できる</a:t>
             </a:r>
-            <a:endParaRPr lang="en-US" sz="1600" dirty="0"/>
+            <a:endParaRPr lang="en-US" sz="1500" dirty="0"/>
           </a:p>
         </p:txBody>
       </p:sp>
@@ -13795,7 +17660,7 @@
         </p:nvSpPr>
         <p:spPr>
           <a:xfrm>
-            <a:off x="777240" y="4343400"/>
+            <a:off x="777240" y="3959352"/>
             <a:ext cx="457200" cy="457200"/>
           </a:xfrm>
           <a:prstGeom prst="ellipse">
@@ -13820,7 +17685,7 @@
         </p:nvSpPr>
         <p:spPr>
           <a:xfrm>
-            <a:off x="777240" y="4343400"/>
+            <a:off x="777240" y="3959352"/>
             <a:ext cx="457200" cy="457200"/>
           </a:xfrm>
           <a:prstGeom prst="rect">
@@ -13859,7 +17724,7 @@
         </p:nvSpPr>
         <p:spPr>
           <a:xfrm>
-            <a:off x="1417320" y="4361688"/>
+            <a:off x="1417320" y="3977640"/>
             <a:ext cx="9966960" cy="457200"/>
           </a:xfrm>
           <a:prstGeom prst="rect">
@@ -13876,7 +17741,7 @@
               <a:buNone/>
             </a:pPr>
             <a:r>
-              <a:rPr lang="en-US" sz="1600" b="1" dirty="0">
+              <a:rPr lang="en-US" sz="1500" b="1" dirty="0">
                 <a:solidFill>
                   <a:srgbClr val="16191D"/>
                 </a:solidFill>
@@ -13890,7 +17755,7 @@
               <a:buNone/>
             </a:pPr>
             <a:r>
-              <a:rPr lang="en-US" sz="1400" dirty="0">
+              <a:rPr lang="en-US" sz="1300" dirty="0">
                 <a:solidFill>
                   <a:srgbClr val="5F6672"/>
                 </a:solidFill>
@@ -13900,7 +17765,7 @@
               </a:rPr>
               <a:t>　の転送と学習の動作を説明できる</a:t>
             </a:r>
-            <a:endParaRPr lang="en-US" sz="1600" dirty="0"/>
+            <a:endParaRPr lang="en-US" sz="1500" dirty="0"/>
           </a:p>
         </p:txBody>
       </p:sp>
@@ -13912,7 +17777,7 @@
         </p:nvSpPr>
         <p:spPr>
           <a:xfrm>
-            <a:off x="777240" y="5202936"/>
+            <a:off x="777240" y="4690872"/>
             <a:ext cx="457200" cy="457200"/>
           </a:xfrm>
           <a:prstGeom prst="ellipse">
@@ -13937,7 +17802,7 @@
         </p:nvSpPr>
         <p:spPr>
           <a:xfrm>
-            <a:off x="777240" y="5202936"/>
+            <a:off x="777240" y="4690872"/>
             <a:ext cx="457200" cy="457200"/>
           </a:xfrm>
           <a:prstGeom prst="rect">
@@ -13976,7 +17841,7 @@
         </p:nvSpPr>
         <p:spPr>
           <a:xfrm>
-            <a:off x="1417320" y="5221224"/>
+            <a:off x="1417320" y="4709160"/>
             <a:ext cx="9966960" cy="457200"/>
           </a:xfrm>
           <a:prstGeom prst="rect">
@@ -13993,7 +17858,7 @@
               <a:buNone/>
             </a:pPr>
             <a:r>
-              <a:rPr lang="en-US" sz="1600" b="1" dirty="0">
+              <a:rPr lang="en-US" sz="1500" b="1" dirty="0">
                 <a:solidFill>
                   <a:srgbClr val="16191D"/>
                 </a:solidFill>
@@ -14007,7 +17872,7 @@
               <a:buNone/>
             </a:pPr>
             <a:r>
-              <a:rPr lang="en-US" sz="1400" dirty="0">
+              <a:rPr lang="en-US" sz="1300" dirty="0">
                 <a:solidFill>
                   <a:srgbClr val="5F6672"/>
                 </a:solidFill>
@@ -14017,7 +17882,124 @@
               </a:rPr>
               <a:t>　の役割の違いを説明できる</a:t>
             </a:r>
-            <a:endParaRPr lang="en-US" sz="1600" dirty="0"/>
+            <a:endParaRPr lang="en-US" sz="1500" dirty="0"/>
+          </a:p>
+        </p:txBody>
+      </p:sp>
+      <p:sp>
+        <p:nvSpPr>
+          <p:cNvPr id="20" name="Shape 18"/>
+          <p:cNvSpPr/>
+          <p:nvPr/>
+        </p:nvSpPr>
+        <p:spPr>
+          <a:xfrm>
+            <a:off x="777240" y="5422392"/>
+            <a:ext cx="457200" cy="457200"/>
+          </a:xfrm>
+          <a:prstGeom prst="ellipse">
+            <a:avLst/>
+          </a:prstGeom>
+          <a:solidFill>
+            <a:srgbClr val="D9E6F4"/>
+          </a:solidFill>
+          <a:ln w="15240">
+            <a:solidFill>
+              <a:srgbClr val="0B5CAD"/>
+            </a:solidFill>
+            <a:prstDash val="solid"/>
+          </a:ln>
+        </p:spPr>
+      </p:sp>
+      <p:sp>
+        <p:nvSpPr>
+          <p:cNvPr id="21" name="Text 19"/>
+          <p:cNvSpPr/>
+          <p:nvPr/>
+        </p:nvSpPr>
+        <p:spPr>
+          <a:xfrm>
+            <a:off x="777240" y="5422392"/>
+            <a:ext cx="457200" cy="457200"/>
+          </a:xfrm>
+          <a:prstGeom prst="rect">
+            <a:avLst/>
+          </a:prstGeom>
+          <a:noFill/>
+          <a:ln/>
+        </p:spPr>
+        <p:txBody>
+          <a:bodyPr wrap="square" lIns="0" tIns="0" rIns="0" bIns="0" rtlCol="0" anchor="ctr"/>
+          <a:lstStyle/>
+          <a:p>
+            <a:pPr algn="ctr" indent="0" marL="0">
+              <a:buNone/>
+            </a:pPr>
+            <a:r>
+              <a:rPr lang="en-US" sz="1400" b="1" dirty="0">
+                <a:solidFill>
+                  <a:srgbClr val="0B5CAD"/>
+                </a:solidFill>
+                <a:latin typeface="Yu Gothic" pitchFamily="34" charset="0"/>
+                <a:ea typeface="Yu Gothic" pitchFamily="34" charset="-122"/>
+                <a:cs typeface="Yu Gothic" pitchFamily="34" charset="-120"/>
+              </a:rPr>
+              <a:t>6</a:t>
+            </a:r>
+            <a:endParaRPr lang="en-US" sz="1400" dirty="0"/>
+          </a:p>
+        </p:txBody>
+      </p:sp>
+      <p:sp>
+        <p:nvSpPr>
+          <p:cNvPr id="22" name="Text 20"/>
+          <p:cNvSpPr/>
+          <p:nvPr/>
+        </p:nvSpPr>
+        <p:spPr>
+          <a:xfrm>
+            <a:off x="1417320" y="5440680"/>
+            <a:ext cx="9966960" cy="457200"/>
+          </a:xfrm>
+          <a:prstGeom prst="rect">
+            <a:avLst/>
+          </a:prstGeom>
+          <a:noFill/>
+          <a:ln/>
+        </p:spPr>
+        <p:txBody>
+          <a:bodyPr wrap="square" lIns="0" tIns="0" rIns="0" bIns="0" rtlCol="0" anchor="ctr"/>
+          <a:lstStyle/>
+          <a:p>
+            <a:pPr indent="0" marL="0">
+              <a:buNone/>
+            </a:pPr>
+            <a:r>
+              <a:rPr lang="en-US" sz="1500" b="1" dirty="0">
+                <a:solidFill>
+                  <a:srgbClr val="16191D"/>
+                </a:solidFill>
+                <a:latin typeface="Yu Gothic" pitchFamily="34" charset="0"/>
+                <a:ea typeface="Yu Gothic" pitchFamily="34" charset="-122"/>
+                <a:cs typeface="Yu Gothic" pitchFamily="34" charset="-120"/>
+              </a:rPr>
+              <a:t>IP アドレスとサブネット</a:t>
+            </a:r>
+            <a:pPr indent="0" marL="0">
+              <a:buNone/>
+            </a:pPr>
+            <a:r>
+              <a:rPr lang="en-US" sz="1300" dirty="0">
+                <a:solidFill>
+                  <a:srgbClr val="5F6672"/>
+                </a:solidFill>
+                <a:latin typeface="Yu Gothic" pitchFamily="34" charset="0"/>
+                <a:ea typeface="Yu Gothic" pitchFamily="34" charset="-122"/>
+                <a:cs typeface="Yu Gothic" pitchFamily="34" charset="-120"/>
+              </a:rPr>
+              <a:t>　の構造を説明し、経路表の引き方を説明できる</a:t>
+            </a:r>
+            <a:endParaRPr lang="en-US" sz="1500" dirty="0"/>
           </a:p>
         </p:txBody>
       </p:sp>
@@ -15352,7 +19334,7 @@
         <p:spPr>
           <a:xfrm>
             <a:off x="685800" y="1481328"/>
-            <a:ext cx="10789920" cy="621792"/>
+            <a:ext cx="10789920" cy="365760"/>
           </a:xfrm>
           <a:prstGeom prst="rect">
             <a:avLst/>
@@ -15393,7 +19375,7 @@
         </p:nvSpPr>
         <p:spPr>
           <a:xfrm>
-            <a:off x="685800" y="2139696"/>
+            <a:off x="685800" y="1883664"/>
             <a:ext cx="2526030" cy="1280160"/>
           </a:xfrm>
           <a:prstGeom prst="roundRect">
@@ -15420,7 +19402,7 @@
         </p:nvSpPr>
         <p:spPr>
           <a:xfrm>
-            <a:off x="868680" y="2276856"/>
+            <a:off x="868680" y="2020824"/>
             <a:ext cx="2160270" cy="310896"/>
           </a:xfrm>
           <a:prstGeom prst="rect">
@@ -15459,7 +19441,7 @@
         </p:nvSpPr>
         <p:spPr>
           <a:xfrm>
-            <a:off x="868680" y="2624328"/>
+            <a:off x="868680" y="2368296"/>
             <a:ext cx="2160270" cy="640080"/>
           </a:xfrm>
           <a:prstGeom prst="rect">
@@ -15501,7 +19483,7 @@
         </p:nvSpPr>
         <p:spPr>
           <a:xfrm>
-            <a:off x="3440430" y="2139696"/>
+            <a:off x="3440430" y="1883664"/>
             <a:ext cx="2526030" cy="1280160"/>
           </a:xfrm>
           <a:prstGeom prst="roundRect">
@@ -15528,7 +19510,7 @@
         </p:nvSpPr>
         <p:spPr>
           <a:xfrm>
-            <a:off x="3623310" y="2276856"/>
+            <a:off x="3623310" y="2020824"/>
             <a:ext cx="2160270" cy="310896"/>
           </a:xfrm>
           <a:prstGeom prst="rect">
@@ -15567,7 +19549,7 @@
         </p:nvSpPr>
         <p:spPr>
           <a:xfrm>
-            <a:off x="3623310" y="2624328"/>
+            <a:off x="3623310" y="2368296"/>
             <a:ext cx="2160270" cy="640080"/>
           </a:xfrm>
           <a:prstGeom prst="rect">
@@ -15609,7 +19591,7 @@
         </p:nvSpPr>
         <p:spPr>
           <a:xfrm>
-            <a:off x="6195060" y="2139696"/>
+            <a:off x="6195060" y="1883664"/>
             <a:ext cx="2526030" cy="1280160"/>
           </a:xfrm>
           <a:prstGeom prst="roundRect">
@@ -15636,7 +19618,7 @@
         </p:nvSpPr>
         <p:spPr>
           <a:xfrm>
-            <a:off x="6377940" y="2276856"/>
+            <a:off x="6377940" y="2020824"/>
             <a:ext cx="2160270" cy="310896"/>
           </a:xfrm>
           <a:prstGeom prst="rect">
@@ -15675,7 +19657,7 @@
         </p:nvSpPr>
         <p:spPr>
           <a:xfrm>
-            <a:off x="6377940" y="2624328"/>
+            <a:off x="6377940" y="2368296"/>
             <a:ext cx="2160270" cy="640080"/>
           </a:xfrm>
           <a:prstGeom prst="rect">
@@ -15717,7 +19699,7 @@
         </p:nvSpPr>
         <p:spPr>
           <a:xfrm>
-            <a:off x="8949690" y="2139696"/>
+            <a:off x="8949690" y="1883664"/>
             <a:ext cx="2526030" cy="1280160"/>
           </a:xfrm>
           <a:prstGeom prst="roundRect">
@@ -15744,7 +19726,7 @@
         </p:nvSpPr>
         <p:spPr>
           <a:xfrm>
-            <a:off x="9132570" y="2276856"/>
+            <a:off x="9132570" y="2020824"/>
             <a:ext cx="2160270" cy="310896"/>
           </a:xfrm>
           <a:prstGeom prst="rect">
@@ -15783,7 +19765,7 @@
         </p:nvSpPr>
         <p:spPr>
           <a:xfrm>
-            <a:off x="9132570" y="2624328"/>
+            <a:off x="9132570" y="2368296"/>
             <a:ext cx="2160270" cy="640080"/>
           </a:xfrm>
           <a:prstGeom prst="rect">
@@ -15825,7 +19807,7 @@
         </p:nvSpPr>
         <p:spPr>
           <a:xfrm>
-            <a:off x="685800" y="3712464"/>
+            <a:off x="685800" y="3456432"/>
             <a:ext cx="10789920" cy="786384"/>
           </a:xfrm>
           <a:prstGeom prst="roundRect">
@@ -15852,7 +19834,7 @@
         </p:nvSpPr>
         <p:spPr>
           <a:xfrm>
-            <a:off x="914400" y="3840480"/>
+            <a:off x="914400" y="3584448"/>
             <a:ext cx="10332720" cy="292608"/>
           </a:xfrm>
           <a:prstGeom prst="rect">
@@ -15891,7 +19873,7 @@
         </p:nvSpPr>
         <p:spPr>
           <a:xfrm>
-            <a:off x="914400" y="4151376"/>
+            <a:off x="914400" y="3895344"/>
             <a:ext cx="10332720" cy="292608"/>
           </a:xfrm>
           <a:prstGeom prst="rect">
@@ -16979,7 +20961,7 @@
         <p:spPr>
           <a:xfrm>
             <a:off x="685800" y="1481328"/>
-            <a:ext cx="10789920" cy="621792"/>
+            <a:ext cx="10789920" cy="365760"/>
           </a:xfrm>
           <a:prstGeom prst="rect">
             <a:avLst/>
@@ -17027,7 +21009,7 @@
           </p:nvPr>
         </p:nvGraphicFramePr>
         <p:xfrm>
-          <a:off x="685800" y="2139696"/>
+          <a:off x="685800" y="1883664"/>
           <a:ext cx="10789920" cy="914400"/>
         </p:xfrm>
         <a:graphic>
@@ -18696,7 +22678,7 @@
         </p:nvSpPr>
         <p:spPr>
           <a:xfrm>
-            <a:off x="685800" y="4608576"/>
+            <a:off x="685800" y="4352544"/>
             <a:ext cx="10789920" cy="457200"/>
           </a:xfrm>
           <a:prstGeom prst="rect">

--- a/slides/第09回_ネットワークの基礎.pptx
+++ b/slides/第09回_ネットワークの基礎.pptx
@@ -4279,45 +4279,6 @@
         </p:nvSpPr>
         <p:spPr>
           <a:xfrm>
-            <a:off x="685800" y="5687568"/>
-            <a:ext cx="10789920" cy="365760"/>
-          </a:xfrm>
-          <a:prstGeom prst="rect">
-            <a:avLst/>
-          </a:prstGeom>
-          <a:noFill/>
-          <a:ln/>
-        </p:spPr>
-        <p:txBody>
-          <a:bodyPr wrap="square" lIns="0" tIns="0" rIns="0" bIns="0" rtlCol="0" anchor="ctr"/>
-          <a:lstStyle/>
-          <a:p>
-            <a:pPr algn="ctr" indent="0" marL="0">
-              <a:buNone/>
-            </a:pPr>
-            <a:r>
-              <a:rPr lang="en-US" sz="1500" dirty="0">
-                <a:solidFill>
-                  <a:srgbClr val="16191D"/>
-                </a:solidFill>
-                <a:latin typeface="Yu Gothic" pitchFamily="34" charset="0"/>
-                <a:ea typeface="Yu Gothic" pitchFamily="34" charset="-122"/>
-                <a:cs typeface="Yu Gothic" pitchFamily="34" charset="-120"/>
-              </a:rPr>
-              <a:t>中継機器は必要な層までしか処理しない。だから中継は速い。</a:t>
-            </a:r>
-            <a:endParaRPr lang="en-US" sz="1500" dirty="0"/>
-          </a:p>
-        </p:txBody>
-      </p:sp>
-      <p:sp>
-        <p:nvSpPr>
-          <p:cNvPr id="7" name="Text 4"/>
-          <p:cNvSpPr/>
-          <p:nvPr/>
-        </p:nvSpPr>
-        <p:spPr>
-          <a:xfrm>
             <a:off x="685800" y="6071616"/>
             <a:ext cx="10789920" cy="640080"/>
           </a:xfrm>
@@ -15580,45 +15541,6 @@
       <p:sp>
         <p:nvSpPr>
           <p:cNvPr id="7" name="Text 4"/>
-          <p:cNvSpPr/>
-          <p:nvPr/>
-        </p:nvSpPr>
-        <p:spPr>
-          <a:xfrm>
-            <a:off x="685800" y="5687568"/>
-            <a:ext cx="10789920" cy="365760"/>
-          </a:xfrm>
-          <a:prstGeom prst="rect">
-            <a:avLst/>
-          </a:prstGeom>
-          <a:noFill/>
-          <a:ln/>
-        </p:spPr>
-        <p:txBody>
-          <a:bodyPr wrap="square" lIns="0" tIns="0" rIns="0" bIns="0" rtlCol="0" anchor="ctr"/>
-          <a:lstStyle/>
-          <a:p>
-            <a:pPr algn="ctr" indent="0" marL="0">
-              <a:buNone/>
-            </a:pPr>
-            <a:r>
-              <a:rPr lang="en-US" sz="1500" dirty="0">
-                <a:solidFill>
-                  <a:srgbClr val="16191D"/>
-                </a:solidFill>
-                <a:latin typeface="Yu Gothic" pitchFamily="34" charset="0"/>
-                <a:ea typeface="Yu Gothic" pitchFamily="34" charset="-122"/>
-                <a:cs typeface="Yu Gothic" pitchFamily="34" charset="-120"/>
-              </a:rPr>
-              <a:t>ポート番号も併せて変換することで、1個のグローバルアドレスを多数の機器で共有できる。</a:t>
-            </a:r>
-            <a:endParaRPr lang="en-US" sz="1500" dirty="0"/>
-          </a:p>
-        </p:txBody>
-      </p:sp>
-      <p:sp>
-        <p:nvSpPr>
-          <p:cNvPr id="8" name="Text 5"/>
           <p:cNvSpPr/>
           <p:nvPr/>
         </p:nvSpPr>

--- a/slides/第09回_ネットワークの基礎.pptx
+++ b/slides/第09回_ネットワークの基礎.pptx
@@ -15917,7 +15917,7 @@
                 <a:ea typeface="Courier New" pitchFamily="34" charset="-122"/>
                 <a:cs typeface="Courier New" pitchFamily="34" charset="-120"/>
               </a:rPr>
-              <a:t>9-2</a:t>
+              <a:t>9-3</a:t>
             </a:r>
             <a:endParaRPr lang="en-US" sz="1300" dirty="0"/>
           </a:p>
@@ -16025,7 +16025,7 @@
                 <a:ea typeface="Courier New" pitchFamily="34" charset="-122"/>
                 <a:cs typeface="Courier New" pitchFamily="34" charset="-120"/>
               </a:rPr>
-              <a:t>9-3</a:t>
+              <a:t>9-4</a:t>
             </a:r>
             <a:endParaRPr lang="en-US" sz="1300" dirty="0"/>
           </a:p>
@@ -16133,7 +16133,7 @@
                 <a:ea typeface="Courier New" pitchFamily="34" charset="-122"/>
                 <a:cs typeface="Courier New" pitchFamily="34" charset="-120"/>
               </a:rPr>
-              <a:t>9-4</a:t>
+              <a:t>9-7</a:t>
             </a:r>
             <a:endParaRPr lang="en-US" sz="1300" dirty="0"/>
           </a:p>
@@ -16241,7 +16241,7 @@
                 <a:ea typeface="Courier New" pitchFamily="34" charset="-122"/>
                 <a:cs typeface="Courier New" pitchFamily="34" charset="-120"/>
               </a:rPr>
-              <a:t>9-5</a:t>
+              <a:t>9-8</a:t>
             </a:r>
             <a:endParaRPr lang="en-US" sz="1300" dirty="0"/>
           </a:p>
@@ -16349,7 +16349,7 @@
                 <a:ea typeface="Courier New" pitchFamily="34" charset="-122"/>
                 <a:cs typeface="Courier New" pitchFamily="34" charset="-120"/>
               </a:rPr>
-              <a:t>9-6</a:t>
+              <a:t>9-10</a:t>
             </a:r>
             <a:endParaRPr lang="en-US" sz="1300" dirty="0"/>
           </a:p>
